--- a/myyntidata_analyysi_07.04.pptx
+++ b/myyntidata_analyysi_07.04.pptx
@@ -22,8 +22,8 @@
     <p:sldId id="271" r:id="rId13"/>
     <p:sldId id="272" r:id="rId14"/>
     <p:sldId id="273" r:id="rId15"/>
-    <p:sldId id="263" r:id="rId16"/>
-    <p:sldId id="264" r:id="rId17"/>
+    <p:sldId id="264" r:id="rId16"/>
+    <p:sldId id="275" r:id="rId17"/>
     <p:sldId id="265" r:id="rId18"/>
     <p:sldId id="274" r:id="rId19"/>
   </p:sldIdLst>
@@ -5258,7 +5258,7 @@
             </a:pPr>
             <a:r>
               <a:rPr lang="fi-FI" sz="1800" dirty="0" err="1"/>
-              <a:t>Important</a:t>
+              <a:t>Problem</a:t>
             </a:r>
             <a:r>
               <a:rPr lang="fi-FI" sz="1800" dirty="0"/>
@@ -6296,406 +6296,6 @@
           <a:chExt cx="0" cy="0"/>
         </a:xfrm>
       </p:grpSpPr>
-      <p:sp>
-        <p:nvSpPr>
-          <p:cNvPr id="2" name="Title 1">
-            <a:extLst>
-              <a:ext uri="{FF2B5EF4-FFF2-40B4-BE49-F238E27FC236}">
-                <a16:creationId xmlns:a16="http://schemas.microsoft.com/office/drawing/2014/main" id="{262F8F48-9A28-22F9-F48B-3B9D71F7A512}"/>
-              </a:ext>
-            </a:extLst>
-          </p:cNvPr>
-          <p:cNvSpPr>
-            <a:spLocks noGrp="1"/>
-          </p:cNvSpPr>
-          <p:nvPr>
-            <p:ph type="title"/>
-          </p:nvPr>
-        </p:nvSpPr>
-        <p:spPr>
-          <a:xfrm>
-            <a:off x="85725" y="0"/>
-            <a:ext cx="2637974" cy="718185"/>
-          </a:xfrm>
-        </p:spPr>
-        <p:txBody>
-          <a:bodyPr/>
-          <a:lstStyle/>
-          <a:p>
-            <a:r>
-              <a:rPr lang="fi-FI" dirty="0"/>
-              <a:t>ML </a:t>
-            </a:r>
-            <a:r>
-              <a:rPr lang="fi-FI" dirty="0" err="1"/>
-              <a:t>Models</a:t>
-            </a:r>
-            <a:endParaRPr lang="fi-FI" dirty="0"/>
-          </a:p>
-        </p:txBody>
-      </p:sp>
-      <p:sp>
-        <p:nvSpPr>
-          <p:cNvPr id="4" name="Slide Number Placeholder 3">
-            <a:extLst>
-              <a:ext uri="{FF2B5EF4-FFF2-40B4-BE49-F238E27FC236}">
-                <a16:creationId xmlns:a16="http://schemas.microsoft.com/office/drawing/2014/main" id="{509A9ACC-186E-1F28-FA4A-BD3F62400260}"/>
-              </a:ext>
-            </a:extLst>
-          </p:cNvPr>
-          <p:cNvSpPr>
-            <a:spLocks noGrp="1"/>
-          </p:cNvSpPr>
-          <p:nvPr>
-            <p:ph type="sldNum" sz="quarter" idx="12"/>
-          </p:nvPr>
-        </p:nvSpPr>
-        <p:spPr/>
-        <p:txBody>
-          <a:bodyPr/>
-          <a:lstStyle/>
-          <a:p>
-            <a:fld id="{CC057153-B650-4DEB-B370-79DDCFDCE934}" type="slidenum">
-              <a:rPr lang="en-US" smtClean="0"/>
-              <a:t>15</a:t>
-            </a:fld>
-            <a:endParaRPr lang="en-US"/>
-          </a:p>
-        </p:txBody>
-      </p:sp>
-      <p:pic>
-        <p:nvPicPr>
-          <p:cNvPr id="8" name="Picture 7">
-            <a:extLst>
-              <a:ext uri="{FF2B5EF4-FFF2-40B4-BE49-F238E27FC236}">
-                <a16:creationId xmlns:a16="http://schemas.microsoft.com/office/drawing/2014/main" id="{DF74247E-C850-B6D6-6A1E-44EE921B97DE}"/>
-              </a:ext>
-            </a:extLst>
-          </p:cNvPr>
-          <p:cNvPicPr>
-            <a:picLocks noChangeAspect="1"/>
-          </p:cNvPicPr>
-          <p:nvPr/>
-        </p:nvPicPr>
-        <p:blipFill>
-          <a:blip r:embed="rId2"/>
-          <a:stretch>
-            <a:fillRect/>
-          </a:stretch>
-        </p:blipFill>
-        <p:spPr>
-          <a:xfrm>
-            <a:off x="164079" y="2714625"/>
-            <a:ext cx="9065646" cy="4143375"/>
-          </a:xfrm>
-          <a:prstGeom prst="rect">
-            <a:avLst/>
-          </a:prstGeom>
-        </p:spPr>
-      </p:pic>
-      <p:pic>
-        <p:nvPicPr>
-          <p:cNvPr id="6" name="Content Placeholder 5">
-            <a:extLst>
-              <a:ext uri="{FF2B5EF4-FFF2-40B4-BE49-F238E27FC236}">
-                <a16:creationId xmlns:a16="http://schemas.microsoft.com/office/drawing/2014/main" id="{838619B0-89B7-D477-A0A1-01B1DE421679}"/>
-              </a:ext>
-            </a:extLst>
-          </p:cNvPr>
-          <p:cNvPicPr>
-            <a:picLocks noGrp="1" noChangeAspect="1"/>
-          </p:cNvPicPr>
-          <p:nvPr>
-            <p:ph idx="1"/>
-          </p:nvPr>
-        </p:nvPicPr>
-        <p:blipFill>
-          <a:blip r:embed="rId3">
-            <a:extLst>
-              <a:ext uri="{28A0092B-C50C-407E-A947-70E740481C1C}">
-                <a14:useLocalDpi xmlns:a14="http://schemas.microsoft.com/office/drawing/2010/main" val="0"/>
-              </a:ext>
-            </a:extLst>
-          </a:blip>
-          <a:stretch>
-            <a:fillRect/>
-          </a:stretch>
-        </p:blipFill>
-        <p:spPr>
-          <a:xfrm>
-            <a:off x="7515225" y="39872"/>
-            <a:ext cx="4331540" cy="3482053"/>
-          </a:xfrm>
-          <a:prstGeom prst="rect">
-            <a:avLst/>
-          </a:prstGeom>
-        </p:spPr>
-      </p:pic>
-      <p:sp>
-        <p:nvSpPr>
-          <p:cNvPr id="9" name="Title 1">
-            <a:extLst>
-              <a:ext uri="{FF2B5EF4-FFF2-40B4-BE49-F238E27FC236}">
-                <a16:creationId xmlns:a16="http://schemas.microsoft.com/office/drawing/2014/main" id="{3CB29C96-E69E-E33B-37D3-DF1714C8E01C}"/>
-              </a:ext>
-            </a:extLst>
-          </p:cNvPr>
-          <p:cNvSpPr txBox="1">
-            <a:spLocks/>
-          </p:cNvSpPr>
-          <p:nvPr/>
-        </p:nvSpPr>
-        <p:spPr>
-          <a:xfrm>
-            <a:off x="5224688" y="359092"/>
-            <a:ext cx="2290537" cy="718185"/>
-          </a:xfrm>
-          <a:prstGeom prst="rect">
-            <a:avLst/>
-          </a:prstGeom>
-        </p:spPr>
-        <p:txBody>
-          <a:bodyPr vert="horz" lIns="91440" tIns="45720" rIns="91440" bIns="45720" rtlCol="0" anchor="t">
-            <a:normAutofit/>
-          </a:bodyPr>
-          <a:lstStyle>
-            <a:lvl1pPr algn="l" defTabSz="914400" rtl="0" eaLnBrk="1" latinLnBrk="0" hangingPunct="1">
-              <a:lnSpc>
-                <a:spcPct val="90000"/>
-              </a:lnSpc>
-              <a:spcBef>
-                <a:spcPct val="0"/>
-              </a:spcBef>
-              <a:buNone/>
-              <a:defRPr sz="3600" b="1" kern="1200">
-                <a:solidFill>
-                  <a:schemeClr val="tx1"/>
-                </a:solidFill>
-                <a:latin typeface="+mj-lt"/>
-                <a:ea typeface="+mj-ea"/>
-                <a:cs typeface="+mj-cs"/>
-              </a:defRPr>
-            </a:lvl1pPr>
-          </a:lstStyle>
-          <a:p>
-            <a:r>
-              <a:rPr lang="fi-FI" sz="1800" b="0" dirty="0" err="1"/>
-              <a:t>Logistic</a:t>
-            </a:r>
-            <a:r>
-              <a:rPr lang="fi-FI" sz="1800" b="0" dirty="0"/>
-              <a:t> Regression</a:t>
-            </a:r>
-          </a:p>
-        </p:txBody>
-      </p:sp>
-      <p:sp>
-        <p:nvSpPr>
-          <p:cNvPr id="10" name="Title 1">
-            <a:extLst>
-              <a:ext uri="{FF2B5EF4-FFF2-40B4-BE49-F238E27FC236}">
-                <a16:creationId xmlns:a16="http://schemas.microsoft.com/office/drawing/2014/main" id="{D253B9A4-880D-9DEA-036B-BBBD4183B798}"/>
-              </a:ext>
-            </a:extLst>
-          </p:cNvPr>
-          <p:cNvSpPr txBox="1">
-            <a:spLocks/>
-          </p:cNvSpPr>
-          <p:nvPr/>
-        </p:nvSpPr>
-        <p:spPr>
-          <a:xfrm>
-            <a:off x="677602" y="2266950"/>
-            <a:ext cx="1903674" cy="447675"/>
-          </a:xfrm>
-          <a:prstGeom prst="rect">
-            <a:avLst/>
-          </a:prstGeom>
-        </p:spPr>
-        <p:txBody>
-          <a:bodyPr vert="horz" lIns="91440" tIns="45720" rIns="91440" bIns="45720" rtlCol="0" anchor="t">
-            <a:normAutofit/>
-          </a:bodyPr>
-          <a:lstStyle>
-            <a:lvl1pPr algn="l" defTabSz="914400" rtl="0" eaLnBrk="1" latinLnBrk="0" hangingPunct="1">
-              <a:lnSpc>
-                <a:spcPct val="90000"/>
-              </a:lnSpc>
-              <a:spcBef>
-                <a:spcPct val="0"/>
-              </a:spcBef>
-              <a:buNone/>
-              <a:defRPr sz="3600" b="1" kern="1200">
-                <a:solidFill>
-                  <a:schemeClr val="tx1"/>
-                </a:solidFill>
-                <a:latin typeface="+mj-lt"/>
-                <a:ea typeface="+mj-ea"/>
-                <a:cs typeface="+mj-cs"/>
-              </a:defRPr>
-            </a:lvl1pPr>
-          </a:lstStyle>
-          <a:p>
-            <a:r>
-              <a:rPr lang="fi-FI" sz="1800" b="0" dirty="0" err="1"/>
-              <a:t>Decision</a:t>
-            </a:r>
-            <a:r>
-              <a:rPr lang="fi-FI" sz="1800" b="0" dirty="0"/>
-              <a:t> </a:t>
-            </a:r>
-            <a:r>
-              <a:rPr lang="fi-FI" sz="1800" b="0" dirty="0" err="1"/>
-              <a:t>Tree</a:t>
-            </a:r>
-            <a:endParaRPr lang="fi-FI" sz="1800" b="0" dirty="0"/>
-          </a:p>
-        </p:txBody>
-      </p:sp>
-      <p:sp>
-        <p:nvSpPr>
-          <p:cNvPr id="11" name="Title 1">
-            <a:extLst>
-              <a:ext uri="{FF2B5EF4-FFF2-40B4-BE49-F238E27FC236}">
-                <a16:creationId xmlns:a16="http://schemas.microsoft.com/office/drawing/2014/main" id="{F7B6079F-383A-C9CE-7F07-F8187DB90A9D}"/>
-              </a:ext>
-            </a:extLst>
-          </p:cNvPr>
-          <p:cNvSpPr txBox="1">
-            <a:spLocks/>
-          </p:cNvSpPr>
-          <p:nvPr/>
-        </p:nvSpPr>
-        <p:spPr>
-          <a:xfrm>
-            <a:off x="345235" y="774382"/>
-            <a:ext cx="2290537" cy="718185"/>
-          </a:xfrm>
-          <a:prstGeom prst="rect">
-            <a:avLst/>
-          </a:prstGeom>
-        </p:spPr>
-        <p:txBody>
-          <a:bodyPr vert="horz" lIns="91440" tIns="45720" rIns="91440" bIns="45720" rtlCol="0" anchor="t">
-            <a:normAutofit fontScale="92500" lnSpcReduction="10000"/>
-          </a:bodyPr>
-          <a:lstStyle>
-            <a:lvl1pPr algn="l" defTabSz="914400" rtl="0" eaLnBrk="1" latinLnBrk="0" hangingPunct="1">
-              <a:lnSpc>
-                <a:spcPct val="90000"/>
-              </a:lnSpc>
-              <a:spcBef>
-                <a:spcPct val="0"/>
-              </a:spcBef>
-              <a:buNone/>
-              <a:defRPr sz="3600" b="1" kern="1200">
-                <a:solidFill>
-                  <a:schemeClr val="tx1"/>
-                </a:solidFill>
-                <a:latin typeface="+mj-lt"/>
-                <a:ea typeface="+mj-ea"/>
-                <a:cs typeface="+mj-cs"/>
-              </a:defRPr>
-            </a:lvl1pPr>
-          </a:lstStyle>
-          <a:p>
-            <a:r>
-              <a:rPr lang="fi-FI" sz="1800" b="0" u="sng" dirty="0" err="1"/>
-              <a:t>Churn</a:t>
-            </a:r>
-            <a:r>
-              <a:rPr lang="fi-FI" sz="1800" b="0" dirty="0"/>
-              <a:t> </a:t>
-            </a:r>
-            <a:r>
-              <a:rPr lang="fi-FI" sz="1800" b="0" dirty="0" err="1"/>
-              <a:t>was</a:t>
-            </a:r>
-            <a:r>
-              <a:rPr lang="fi-FI" sz="1800" b="0" dirty="0"/>
-              <a:t> </a:t>
-            </a:r>
-            <a:r>
-              <a:rPr lang="fi-FI" sz="1800" b="0" dirty="0" err="1"/>
-              <a:t>the</a:t>
-            </a:r>
-            <a:r>
-              <a:rPr lang="fi-FI" sz="1800" b="0" dirty="0"/>
-              <a:t> main </a:t>
-            </a:r>
-            <a:r>
-              <a:rPr lang="fi-FI" sz="1800" b="0" dirty="0" err="1"/>
-              <a:t>metric</a:t>
-            </a:r>
-            <a:r>
-              <a:rPr lang="fi-FI" sz="1800" b="0" dirty="0"/>
-              <a:t> </a:t>
-            </a:r>
-            <a:r>
-              <a:rPr lang="fi-FI" sz="1800" b="0" dirty="0" err="1"/>
-              <a:t>which</a:t>
-            </a:r>
-            <a:r>
-              <a:rPr lang="fi-FI" sz="1800" b="0" dirty="0"/>
-              <a:t> </a:t>
-            </a:r>
-            <a:r>
-              <a:rPr lang="fi-FI" sz="1800" b="0" dirty="0" err="1"/>
-              <a:t>has</a:t>
-            </a:r>
-            <a:r>
-              <a:rPr lang="fi-FI" sz="1800" b="0" dirty="0"/>
-              <a:t> </a:t>
-            </a:r>
-            <a:r>
-              <a:rPr lang="fi-FI" sz="1800" b="0" dirty="0" err="1"/>
-              <a:t>been</a:t>
-            </a:r>
-            <a:r>
-              <a:rPr lang="fi-FI" sz="1800" b="0" dirty="0"/>
-              <a:t> </a:t>
-            </a:r>
-            <a:r>
-              <a:rPr lang="fi-FI" sz="1800" b="0" dirty="0" err="1"/>
-              <a:t>used</a:t>
-            </a:r>
-            <a:r>
-              <a:rPr lang="fi-FI" sz="1800" b="0" dirty="0"/>
-              <a:t>.</a:t>
-            </a:r>
-          </a:p>
-        </p:txBody>
-      </p:sp>
-    </p:spTree>
-    <p:extLst>
-      <p:ext uri="{BB962C8B-B14F-4D97-AF65-F5344CB8AC3E}">
-        <p14:creationId xmlns:p14="http://schemas.microsoft.com/office/powerpoint/2010/main" val="910695570"/>
-      </p:ext>
-    </p:extLst>
-  </p:cSld>
-  <p:clrMapOvr>
-    <a:masterClrMapping/>
-  </p:clrMapOvr>
-</p:sld>
-</file>
-
-<file path=ppt/slides/slide16.xml><?xml version="1.0" encoding="utf-8"?>
-<p:sld xmlns:a="http://schemas.openxmlformats.org/drawingml/2006/main" xmlns:r="http://schemas.openxmlformats.org/officeDocument/2006/relationships" xmlns:p="http://schemas.openxmlformats.org/presentationml/2006/main">
-  <p:cSld>
-    <p:spTree>
-      <p:nvGrpSpPr>
-        <p:cNvPr id="1" name=""/>
-        <p:cNvGrpSpPr/>
-        <p:nvPr/>
-      </p:nvGrpSpPr>
-      <p:grpSpPr>
-        <a:xfrm>
-          <a:off x="0" y="0"/>
-          <a:ext cx="0" cy="0"/>
-          <a:chOff x="0" y="0"/>
-          <a:chExt cx="0" cy="0"/>
-        </a:xfrm>
-      </p:grpSpPr>
       <p:pic>
         <p:nvPicPr>
           <p:cNvPr id="6" name="Content Placeholder 5">
@@ -6752,7 +6352,7 @@
           <a:p>
             <a:fld id="{CC057153-B650-4DEB-B370-79DDCFDCE934}" type="slidenum">
               <a:rPr lang="en-US" smtClean="0"/>
-              <a:t>16</a:t>
+              <a:t>15</a:t>
             </a:fld>
             <a:endParaRPr lang="en-US"/>
           </a:p>
@@ -6780,7 +6380,7 @@
         </p:blipFill>
         <p:spPr>
           <a:xfrm>
-            <a:off x="7019509" y="766716"/>
+            <a:off x="7019509" y="443159"/>
             <a:ext cx="5172491" cy="4486682"/>
           </a:xfrm>
           <a:prstGeom prst="rect">
@@ -6819,10 +6419,423 @@
           </a:prstGeom>
         </p:spPr>
       </p:pic>
+      <p:sp>
+        <p:nvSpPr>
+          <p:cNvPr id="2" name="Title 1">
+            <a:extLst>
+              <a:ext uri="{FF2B5EF4-FFF2-40B4-BE49-F238E27FC236}">
+                <a16:creationId xmlns:a16="http://schemas.microsoft.com/office/drawing/2014/main" id="{0D987DF6-0A12-77B0-AE71-0F3F90928FE0}"/>
+              </a:ext>
+            </a:extLst>
+          </p:cNvPr>
+          <p:cNvSpPr>
+            <a:spLocks noGrp="1"/>
+          </p:cNvSpPr>
+          <p:nvPr>
+            <p:ph type="title"/>
+          </p:nvPr>
+        </p:nvSpPr>
+        <p:spPr>
+          <a:xfrm>
+            <a:off x="7294977" y="5335911"/>
+            <a:ext cx="4621553" cy="1034577"/>
+          </a:xfrm>
+        </p:spPr>
+        <p:txBody>
+          <a:bodyPr anchor="b">
+            <a:normAutofit fontScale="90000"/>
+          </a:bodyPr>
+          <a:lstStyle/>
+          <a:p>
+            <a:r>
+              <a:rPr lang="fi-FI" dirty="0"/>
+              <a:t>ML </a:t>
+            </a:r>
+            <a:r>
+              <a:rPr lang="fi-FI" dirty="0" err="1"/>
+              <a:t>cont’d</a:t>
+            </a:r>
+            <a:r>
+              <a:rPr lang="fi-FI" dirty="0"/>
+              <a:t> (K-</a:t>
+            </a:r>
+            <a:r>
+              <a:rPr lang="fi-FI" dirty="0" err="1"/>
+              <a:t>Means</a:t>
+            </a:r>
+            <a:r>
+              <a:rPr lang="fi-FI" dirty="0"/>
+              <a:t> Clustering)</a:t>
+            </a:r>
+          </a:p>
+        </p:txBody>
+      </p:sp>
     </p:spTree>
     <p:extLst>
       <p:ext uri="{BB962C8B-B14F-4D97-AF65-F5344CB8AC3E}">
         <p14:creationId xmlns:p14="http://schemas.microsoft.com/office/powerpoint/2010/main" val="1265597015"/>
+      </p:ext>
+    </p:extLst>
+  </p:cSld>
+  <p:clrMapOvr>
+    <a:masterClrMapping/>
+  </p:clrMapOvr>
+</p:sld>
+</file>
+
+<file path=ppt/slides/slide16.xml><?xml version="1.0" encoding="utf-8"?>
+<p:sld xmlns:a="http://schemas.openxmlformats.org/drawingml/2006/main" xmlns:r="http://schemas.openxmlformats.org/officeDocument/2006/relationships" xmlns:p="http://schemas.openxmlformats.org/presentationml/2006/main">
+  <p:cSld>
+    <p:bg>
+      <p:bgPr>
+        <a:solidFill>
+          <a:schemeClr val="bg1"/>
+        </a:solidFill>
+        <a:effectLst/>
+      </p:bgPr>
+    </p:bg>
+    <p:spTree>
+      <p:nvGrpSpPr>
+        <p:cNvPr id="1" name="">
+          <a:extLst>
+            <a:ext uri="{FF2B5EF4-FFF2-40B4-BE49-F238E27FC236}">
+              <a16:creationId xmlns:a16="http://schemas.microsoft.com/office/drawing/2014/main" id="{8CBB2A65-0560-6372-355D-5FC850FCB553}"/>
+            </a:ext>
+          </a:extLst>
+        </p:cNvPr>
+        <p:cNvGrpSpPr/>
+        <p:nvPr/>
+      </p:nvGrpSpPr>
+      <p:grpSpPr>
+        <a:xfrm>
+          <a:off x="0" y="0"/>
+          <a:ext cx="0" cy="0"/>
+          <a:chOff x="0" y="0"/>
+          <a:chExt cx="0" cy="0"/>
+        </a:xfrm>
+      </p:grpSpPr>
+      <p:sp useBgFill="1">
+        <p:nvSpPr>
+          <p:cNvPr id="13" name="Rectangle 12">
+            <a:extLst>
+              <a:ext uri="{FF2B5EF4-FFF2-40B4-BE49-F238E27FC236}">
+                <a16:creationId xmlns:a16="http://schemas.microsoft.com/office/drawing/2014/main" id="{93009993-433E-E50B-05C4-9B820A3CFFA1}"/>
+              </a:ext>
+              <a:ext uri="{C183D7F6-B498-43B3-948B-1728B52AA6E4}">
+                <adec:decorative xmlns:adec="http://schemas.microsoft.com/office/drawing/2017/decorative" val="1"/>
+              </a:ext>
+            </a:extLst>
+          </p:cNvPr>
+          <p:cNvSpPr>
+            <a:spLocks noGrp="1" noRot="1" noChangeAspect="1" noMove="1" noResize="1" noEditPoints="1" noAdjustHandles="1" noChangeArrowheads="1" noChangeShapeType="1" noTextEdit="1"/>
+          </p:cNvSpPr>
+          <p:nvPr>
+            <p:extLst>
+              <p:ext uri="{386F3935-93C4-4BCD-93E2-E3B085C9AB24}">
+                <p16:designElem xmlns:p16="http://schemas.microsoft.com/office/powerpoint/2015/main" val="1"/>
+              </p:ext>
+            </p:extLst>
+          </p:nvPr>
+        </p:nvSpPr>
+        <p:spPr>
+          <a:xfrm>
+            <a:off x="0" y="0"/>
+            <a:ext cx="12192000" cy="6858000"/>
+          </a:xfrm>
+          <a:prstGeom prst="rect">
+            <a:avLst/>
+          </a:prstGeom>
+          <a:ln w="12700" cap="flat" cmpd="sng" algn="ctr">
+            <a:noFill/>
+            <a:prstDash val="solid"/>
+            <a:miter lim="800000"/>
+          </a:ln>
+          <a:effectLst/>
+          <a:extLst>
+            <a:ext uri="{91240B29-F687-4F45-9708-019B960494DF}">
+              <a14:hiddenLine xmlns:a14="http://schemas.microsoft.com/office/drawing/2010/main" w="12700" cap="flat" cmpd="sng" algn="ctr">
+                <a:solidFill>
+                  <a:schemeClr val="accent1">
+                    <a:shade val="15000"/>
+                  </a:schemeClr>
+                </a:solidFill>
+                <a:prstDash val="solid"/>
+                <a:miter lim="800000"/>
+              </a14:hiddenLine>
+            </a:ext>
+          </a:extLst>
+        </p:spPr>
+        <p:style>
+          <a:lnRef idx="2">
+            <a:schemeClr val="accent1">
+              <a:shade val="15000"/>
+            </a:schemeClr>
+          </a:lnRef>
+          <a:fillRef idx="1">
+            <a:schemeClr val="accent1"/>
+          </a:fillRef>
+          <a:effectRef idx="0">
+            <a:schemeClr val="accent1"/>
+          </a:effectRef>
+          <a:fontRef idx="minor">
+            <a:schemeClr val="lt1"/>
+          </a:fontRef>
+        </p:style>
+        <p:txBody>
+          <a:bodyPr rtlCol="0" anchor="ctr"/>
+          <a:lstStyle/>
+          <a:p>
+            <a:pPr algn="ctr"/>
+            <a:endParaRPr lang="en-US"/>
+          </a:p>
+        </p:txBody>
+      </p:sp>
+      <p:sp>
+        <p:nvSpPr>
+          <p:cNvPr id="2" name="Title 1">
+            <a:extLst>
+              <a:ext uri="{FF2B5EF4-FFF2-40B4-BE49-F238E27FC236}">
+                <a16:creationId xmlns:a16="http://schemas.microsoft.com/office/drawing/2014/main" id="{67BBED82-87F7-D3F4-B0E0-19EFE1D5EB36}"/>
+              </a:ext>
+            </a:extLst>
+          </p:cNvPr>
+          <p:cNvSpPr>
+            <a:spLocks noGrp="1"/>
+          </p:cNvSpPr>
+          <p:nvPr>
+            <p:ph type="title"/>
+          </p:nvPr>
+        </p:nvSpPr>
+        <p:spPr>
+          <a:xfrm>
+            <a:off x="612648" y="434559"/>
+            <a:ext cx="4621553" cy="1360728"/>
+          </a:xfrm>
+        </p:spPr>
+        <p:txBody>
+          <a:bodyPr anchor="b">
+            <a:normAutofit/>
+          </a:bodyPr>
+          <a:lstStyle/>
+          <a:p>
+            <a:r>
+              <a:rPr lang="fi-FI" dirty="0"/>
+              <a:t>ML </a:t>
+            </a:r>
+            <a:r>
+              <a:rPr lang="fi-FI" dirty="0" err="1"/>
+              <a:t>cont’d</a:t>
+            </a:r>
+            <a:r>
+              <a:rPr lang="fi-FI" dirty="0"/>
+              <a:t> (Random </a:t>
+            </a:r>
+            <a:r>
+              <a:rPr lang="fi-FI" dirty="0" err="1"/>
+              <a:t>Forest</a:t>
+            </a:r>
+            <a:r>
+              <a:rPr lang="fi-FI" dirty="0"/>
+              <a:t>)</a:t>
+            </a:r>
+          </a:p>
+        </p:txBody>
+      </p:sp>
+      <p:sp>
+        <p:nvSpPr>
+          <p:cNvPr id="10" name="Content Placeholder 9">
+            <a:extLst>
+              <a:ext uri="{FF2B5EF4-FFF2-40B4-BE49-F238E27FC236}">
+                <a16:creationId xmlns:a16="http://schemas.microsoft.com/office/drawing/2014/main" id="{583F03AA-7778-A107-E347-4F118F6051D2}"/>
+              </a:ext>
+            </a:extLst>
+          </p:cNvPr>
+          <p:cNvSpPr>
+            <a:spLocks noGrp="1"/>
+          </p:cNvSpPr>
+          <p:nvPr>
+            <p:ph idx="1"/>
+          </p:nvPr>
+        </p:nvSpPr>
+        <p:spPr>
+          <a:xfrm>
+            <a:off x="612647" y="2229846"/>
+            <a:ext cx="4621553" cy="3159018"/>
+          </a:xfrm>
+        </p:spPr>
+        <p:txBody>
+          <a:bodyPr>
+            <a:normAutofit lnSpcReduction="10000"/>
+          </a:bodyPr>
+          <a:lstStyle/>
+          <a:p>
+            <a:r>
+              <a:rPr lang="fi-FI" sz="1800" dirty="0" err="1"/>
+              <a:t>Number</a:t>
+            </a:r>
+            <a:r>
+              <a:rPr lang="fi-FI" sz="1800" dirty="0"/>
+              <a:t> of </a:t>
+            </a:r>
+            <a:r>
+              <a:rPr lang="fi-FI" sz="1800" dirty="0" err="1"/>
+              <a:t>trees</a:t>
+            </a:r>
+            <a:r>
+              <a:rPr lang="fi-FI" sz="1800" dirty="0"/>
+              <a:t>: 100</a:t>
+            </a:r>
+          </a:p>
+          <a:p>
+            <a:r>
+              <a:rPr lang="fi-FI" sz="1800" dirty="0"/>
+              <a:t>Max </a:t>
+            </a:r>
+            <a:r>
+              <a:rPr lang="fi-FI" sz="1800" dirty="0" err="1"/>
+              <a:t>depth</a:t>
+            </a:r>
+            <a:r>
+              <a:rPr lang="fi-FI" sz="1800" dirty="0"/>
+              <a:t>: 10</a:t>
+            </a:r>
+          </a:p>
+          <a:p>
+            <a:r>
+              <a:rPr lang="fi-FI" sz="1800" dirty="0" err="1"/>
+              <a:t>Model</a:t>
+            </a:r>
+            <a:r>
+              <a:rPr lang="fi-FI" sz="1800" dirty="0"/>
+              <a:t> Performance:</a:t>
+            </a:r>
+          </a:p>
+          <a:p>
+            <a:pPr lvl="1"/>
+            <a:r>
+              <a:rPr lang="fi-FI" dirty="0" err="1"/>
+              <a:t>Accuracy</a:t>
+            </a:r>
+            <a:r>
+              <a:rPr lang="fi-FI" dirty="0"/>
+              <a:t>: 0.6906 </a:t>
+            </a:r>
+          </a:p>
+          <a:p>
+            <a:pPr lvl="1"/>
+            <a:r>
+              <a:rPr lang="fi-FI" dirty="0"/>
+              <a:t>Precision: 0.6418</a:t>
+            </a:r>
+          </a:p>
+          <a:p>
+            <a:pPr lvl="1"/>
+            <a:r>
+              <a:rPr lang="fi-FI" dirty="0" err="1"/>
+              <a:t>Recall</a:t>
+            </a:r>
+            <a:r>
+              <a:rPr lang="fi-FI" dirty="0"/>
+              <a:t>: 0.6605 </a:t>
+            </a:r>
+          </a:p>
+          <a:p>
+            <a:pPr lvl="1"/>
+            <a:r>
+              <a:rPr lang="fi-FI" dirty="0"/>
+              <a:t>F1-Score: 0.6510</a:t>
+            </a:r>
+          </a:p>
+          <a:p>
+            <a:pPr lvl="1"/>
+            <a:r>
+              <a:rPr lang="fi-FI" dirty="0"/>
+              <a:t>ROC-AUC: 0.7610</a:t>
+            </a:r>
+            <a:endParaRPr lang="en-US" dirty="0"/>
+          </a:p>
+        </p:txBody>
+      </p:sp>
+      <p:sp>
+        <p:nvSpPr>
+          <p:cNvPr id="4" name="Slide Number Placeholder 3">
+            <a:extLst>
+              <a:ext uri="{FF2B5EF4-FFF2-40B4-BE49-F238E27FC236}">
+                <a16:creationId xmlns:a16="http://schemas.microsoft.com/office/drawing/2014/main" id="{F499E99D-0C5C-53FC-7BB5-050638FD58BE}"/>
+              </a:ext>
+            </a:extLst>
+          </p:cNvPr>
+          <p:cNvSpPr>
+            <a:spLocks noGrp="1"/>
+          </p:cNvSpPr>
+          <p:nvPr>
+            <p:ph type="sldNum" sz="quarter" idx="12"/>
+          </p:nvPr>
+        </p:nvSpPr>
+        <p:spPr>
+          <a:xfrm>
+            <a:off x="11632162" y="6453002"/>
+            <a:ext cx="429207" cy="365125"/>
+          </a:xfrm>
+        </p:spPr>
+        <p:txBody>
+          <a:bodyPr>
+            <a:normAutofit/>
+          </a:bodyPr>
+          <a:lstStyle/>
+          <a:p>
+            <a:pPr>
+              <a:spcAft>
+                <a:spcPts val="600"/>
+              </a:spcAft>
+            </a:pPr>
+            <a:fld id="{CC057153-B650-4DEB-B370-79DDCFDCE934}" type="slidenum">
+              <a:rPr lang="en-US" smtClean="0"/>
+              <a:pPr>
+                <a:spcAft>
+                  <a:spcPts val="600"/>
+                </a:spcAft>
+              </a:pPr>
+              <a:t>16</a:t>
+            </a:fld>
+            <a:endParaRPr lang="en-US"/>
+          </a:p>
+        </p:txBody>
+      </p:sp>
+      <p:pic>
+        <p:nvPicPr>
+          <p:cNvPr id="5" name="Picture 4">
+            <a:extLst>
+              <a:ext uri="{FF2B5EF4-FFF2-40B4-BE49-F238E27FC236}">
+                <a16:creationId xmlns:a16="http://schemas.microsoft.com/office/drawing/2014/main" id="{E2076DE4-E924-3555-DD40-9C8882EAB369}"/>
+              </a:ext>
+            </a:extLst>
+          </p:cNvPr>
+          <p:cNvPicPr>
+            <a:picLocks noChangeAspect="1"/>
+          </p:cNvPicPr>
+          <p:nvPr/>
+        </p:nvPicPr>
+        <p:blipFill>
+          <a:blip r:embed="rId2"/>
+          <a:stretch>
+            <a:fillRect/>
+          </a:stretch>
+        </p:blipFill>
+        <p:spPr>
+          <a:xfrm>
+            <a:off x="5319925" y="576426"/>
+            <a:ext cx="5868219" cy="4677428"/>
+          </a:xfrm>
+          <a:prstGeom prst="rect">
+            <a:avLst/>
+          </a:prstGeom>
+        </p:spPr>
+      </p:pic>
+    </p:spTree>
+    <p:extLst>
+      <p:ext uri="{BB962C8B-B14F-4D97-AF65-F5344CB8AC3E}">
+        <p14:creationId xmlns:p14="http://schemas.microsoft.com/office/powerpoint/2010/main" val="2460832619"/>
       </p:ext>
     </p:extLst>
   </p:cSld>

--- a/myyntidata_analyysi_07.04.pptx
+++ b/myyntidata_analyysi_07.04.pptx
@@ -5,7 +5,7 @@
     <p:sldMasterId id="2147483660" r:id="rId1"/>
   </p:sldMasterIdLst>
   <p:notesMasterIdLst>
-    <p:notesMasterId r:id="rId20"/>
+    <p:notesMasterId r:id="rId22"/>
   </p:notesMasterIdLst>
   <p:sldIdLst>
     <p:sldId id="256" r:id="rId2"/>
@@ -26,6 +26,8 @@
     <p:sldId id="275" r:id="rId17"/>
     <p:sldId id="265" r:id="rId18"/>
     <p:sldId id="274" r:id="rId19"/>
+    <p:sldId id="276" r:id="rId20"/>
+    <p:sldId id="277" r:id="rId21"/>
   </p:sldIdLst>
   <p:sldSz cx="12192000" cy="6858000"/>
   <p:notesSz cx="6858000" cy="9144000"/>
@@ -7424,6 +7426,332 @@
 </p:sld>
 </file>
 
+<file path=ppt/slides/slide19.xml><?xml version="1.0" encoding="utf-8"?>
+<p:sld xmlns:a="http://schemas.openxmlformats.org/drawingml/2006/main" xmlns:r="http://schemas.openxmlformats.org/officeDocument/2006/relationships" xmlns:p="http://schemas.openxmlformats.org/presentationml/2006/main">
+  <p:cSld>
+    <p:spTree>
+      <p:nvGrpSpPr>
+        <p:cNvPr id="1" name=""/>
+        <p:cNvGrpSpPr/>
+        <p:nvPr/>
+      </p:nvGrpSpPr>
+      <p:grpSpPr>
+        <a:xfrm>
+          <a:off x="0" y="0"/>
+          <a:ext cx="0" cy="0"/>
+          <a:chOff x="0" y="0"/>
+          <a:chExt cx="0" cy="0"/>
+        </a:xfrm>
+      </p:grpSpPr>
+      <p:sp>
+        <p:nvSpPr>
+          <p:cNvPr id="2" name="Title 1">
+            <a:extLst>
+              <a:ext uri="{FF2B5EF4-FFF2-40B4-BE49-F238E27FC236}">
+                <a16:creationId xmlns:a16="http://schemas.microsoft.com/office/drawing/2014/main" id="{326E0F70-94D9-D6BD-6355-30FB6DD336CD}"/>
+              </a:ext>
+            </a:extLst>
+          </p:cNvPr>
+          <p:cNvSpPr>
+            <a:spLocks noGrp="1"/>
+          </p:cNvSpPr>
+          <p:nvPr>
+            <p:ph type="title"/>
+          </p:nvPr>
+        </p:nvSpPr>
+        <p:spPr>
+          <a:xfrm>
+            <a:off x="612648" y="548640"/>
+            <a:ext cx="10653578" cy="830981"/>
+          </a:xfrm>
+        </p:spPr>
+        <p:txBody>
+          <a:bodyPr/>
+          <a:lstStyle/>
+          <a:p>
+            <a:r>
+              <a:rPr lang="fi-FI" dirty="0" err="1"/>
+              <a:t>Challenges</a:t>
+            </a:r>
+            <a:endParaRPr lang="fi-FI" dirty="0"/>
+          </a:p>
+        </p:txBody>
+      </p:sp>
+      <p:sp>
+        <p:nvSpPr>
+          <p:cNvPr id="3" name="Content Placeholder 2">
+            <a:extLst>
+              <a:ext uri="{FF2B5EF4-FFF2-40B4-BE49-F238E27FC236}">
+                <a16:creationId xmlns:a16="http://schemas.microsoft.com/office/drawing/2014/main" id="{52FDD597-C721-E76A-72E5-07350D7F3DA4}"/>
+              </a:ext>
+            </a:extLst>
+          </p:cNvPr>
+          <p:cNvSpPr>
+            <a:spLocks noGrp="1"/>
+          </p:cNvSpPr>
+          <p:nvPr>
+            <p:ph idx="1"/>
+          </p:nvPr>
+        </p:nvSpPr>
+        <p:spPr>
+          <a:xfrm>
+            <a:off x="612647" y="1379621"/>
+            <a:ext cx="10653579" cy="4929739"/>
+          </a:xfrm>
+        </p:spPr>
+        <p:txBody>
+          <a:bodyPr/>
+          <a:lstStyle/>
+          <a:p>
+            <a:r>
+              <a:rPr lang="fi-FI" dirty="0"/>
+              <a:t>A </a:t>
+            </a:r>
+            <a:r>
+              <a:rPr lang="fi-FI" dirty="0" err="1"/>
+              <a:t>lot</a:t>
+            </a:r>
+            <a:r>
+              <a:rPr lang="fi-FI" dirty="0"/>
+              <a:t> of </a:t>
+            </a:r>
+            <a:r>
+              <a:rPr lang="fi-FI" dirty="0" err="1"/>
+              <a:t>noise</a:t>
+            </a:r>
+            <a:r>
+              <a:rPr lang="fi-FI" dirty="0"/>
+              <a:t> in </a:t>
+            </a:r>
+            <a:r>
+              <a:rPr lang="fi-FI" dirty="0" err="1"/>
+              <a:t>the</a:t>
+            </a:r>
+            <a:r>
+              <a:rPr lang="fi-FI" dirty="0"/>
+              <a:t> </a:t>
+            </a:r>
+            <a:r>
+              <a:rPr lang="fi-FI" dirty="0" err="1"/>
+              <a:t>customer</a:t>
+            </a:r>
+            <a:r>
+              <a:rPr lang="fi-FI" dirty="0"/>
+              <a:t> data</a:t>
+            </a:r>
+          </a:p>
+          <a:p>
+            <a:r>
+              <a:rPr lang="fi-FI" dirty="0" err="1"/>
+              <a:t>Figuring</a:t>
+            </a:r>
+            <a:r>
+              <a:rPr lang="fi-FI" dirty="0"/>
+              <a:t> out </a:t>
+            </a:r>
+            <a:r>
+              <a:rPr lang="fi-FI" dirty="0" err="1"/>
+              <a:t>what</a:t>
+            </a:r>
+            <a:r>
+              <a:rPr lang="fi-FI" dirty="0"/>
+              <a:t> </a:t>
+            </a:r>
+            <a:r>
+              <a:rPr lang="fi-FI" dirty="0" err="1"/>
+              <a:t>actually</a:t>
+            </a:r>
+            <a:r>
+              <a:rPr lang="fi-FI" dirty="0"/>
+              <a:t> is </a:t>
+            </a:r>
+            <a:r>
+              <a:rPr lang="fi-FI" dirty="0" err="1"/>
+              <a:t>affecting</a:t>
+            </a:r>
+            <a:r>
+              <a:rPr lang="fi-FI" dirty="0"/>
+              <a:t> </a:t>
+            </a:r>
+            <a:r>
+              <a:rPr lang="fi-FI" dirty="0" err="1"/>
+              <a:t>the</a:t>
+            </a:r>
+            <a:r>
+              <a:rPr lang="fi-FI" dirty="0"/>
+              <a:t> data</a:t>
+            </a:r>
+          </a:p>
+          <a:p>
+            <a:r>
+              <a:rPr lang="fi-FI" dirty="0" err="1"/>
+              <a:t>Cleaning</a:t>
+            </a:r>
+            <a:r>
+              <a:rPr lang="fi-FI" dirty="0"/>
+              <a:t> </a:t>
+            </a:r>
+            <a:r>
+              <a:rPr lang="fi-FI" dirty="0" err="1"/>
+              <a:t>the</a:t>
+            </a:r>
+            <a:r>
+              <a:rPr lang="fi-FI" dirty="0"/>
+              <a:t> </a:t>
+            </a:r>
+            <a:r>
+              <a:rPr lang="fi-FI" dirty="0" err="1"/>
+              <a:t>features</a:t>
+            </a:r>
+            <a:r>
+              <a:rPr lang="fi-FI" dirty="0"/>
+              <a:t> and </a:t>
+            </a:r>
+            <a:r>
+              <a:rPr lang="fi-FI" dirty="0" err="1"/>
+              <a:t>deciding</a:t>
+            </a:r>
+            <a:r>
+              <a:rPr lang="fi-FI" dirty="0"/>
+              <a:t> </a:t>
+            </a:r>
+            <a:r>
+              <a:rPr lang="fi-FI" dirty="0" err="1"/>
+              <a:t>which</a:t>
+            </a:r>
+            <a:r>
+              <a:rPr lang="fi-FI" dirty="0"/>
+              <a:t> </a:t>
+            </a:r>
+            <a:r>
+              <a:rPr lang="fi-FI" dirty="0" err="1"/>
+              <a:t>cleaned</a:t>
+            </a:r>
+            <a:r>
+              <a:rPr lang="fi-FI" dirty="0"/>
+              <a:t> </a:t>
+            </a:r>
+            <a:r>
+              <a:rPr lang="fi-FI" dirty="0" err="1"/>
+              <a:t>features</a:t>
+            </a:r>
+            <a:r>
+              <a:rPr lang="fi-FI" dirty="0"/>
+              <a:t> to </a:t>
+            </a:r>
+            <a:r>
+              <a:rPr lang="fi-FI" dirty="0" err="1"/>
+              <a:t>keep</a:t>
+            </a:r>
+            <a:endParaRPr lang="fi-FI" dirty="0"/>
+          </a:p>
+          <a:p>
+            <a:r>
+              <a:rPr lang="fi-FI" dirty="0" err="1"/>
+              <a:t>Extracting</a:t>
+            </a:r>
+            <a:r>
+              <a:rPr lang="fi-FI" dirty="0"/>
+              <a:t> </a:t>
+            </a:r>
+            <a:r>
+              <a:rPr lang="fi-FI" dirty="0" err="1"/>
+              <a:t>useful</a:t>
+            </a:r>
+            <a:r>
+              <a:rPr lang="fi-FI" dirty="0"/>
+              <a:t> </a:t>
+            </a:r>
+            <a:r>
+              <a:rPr lang="fi-FI" dirty="0" err="1"/>
+              <a:t>customer</a:t>
+            </a:r>
+            <a:r>
+              <a:rPr lang="fi-FI" dirty="0"/>
+              <a:t> </a:t>
+            </a:r>
+            <a:r>
+              <a:rPr lang="fi-FI" dirty="0" err="1"/>
+              <a:t>insights</a:t>
+            </a:r>
+            <a:r>
+              <a:rPr lang="fi-FI" dirty="0"/>
+              <a:t> </a:t>
+            </a:r>
+            <a:r>
+              <a:rPr lang="fi-FI" dirty="0" err="1"/>
+              <a:t>from</a:t>
+            </a:r>
+            <a:r>
+              <a:rPr lang="fi-FI" dirty="0"/>
+              <a:t> </a:t>
+            </a:r>
+            <a:r>
+              <a:rPr lang="fi-FI" dirty="0" err="1"/>
+              <a:t>the</a:t>
+            </a:r>
+            <a:r>
+              <a:rPr lang="fi-FI" dirty="0"/>
+              <a:t> </a:t>
+            </a:r>
+            <a:r>
+              <a:rPr lang="fi-FI" dirty="0" err="1"/>
+              <a:t>selected</a:t>
+            </a:r>
+            <a:r>
+              <a:rPr lang="fi-FI" dirty="0"/>
+              <a:t> </a:t>
+            </a:r>
+            <a:r>
+              <a:rPr lang="fi-FI" dirty="0" err="1"/>
+              <a:t>features</a:t>
+            </a:r>
+            <a:endParaRPr lang="fi-FI" dirty="0"/>
+          </a:p>
+        </p:txBody>
+      </p:sp>
+      <p:sp>
+        <p:nvSpPr>
+          <p:cNvPr id="4" name="Slide Number Placeholder 3">
+            <a:extLst>
+              <a:ext uri="{FF2B5EF4-FFF2-40B4-BE49-F238E27FC236}">
+                <a16:creationId xmlns:a16="http://schemas.microsoft.com/office/drawing/2014/main" id="{C164E8C2-6E51-14D0-AA9B-4EFFC09DA818}"/>
+              </a:ext>
+            </a:extLst>
+          </p:cNvPr>
+          <p:cNvSpPr>
+            <a:spLocks noGrp="1"/>
+          </p:cNvSpPr>
+          <p:nvPr>
+            <p:ph type="sldNum" sz="quarter" idx="12"/>
+          </p:nvPr>
+        </p:nvSpPr>
+        <p:spPr/>
+        <p:txBody>
+          <a:bodyPr/>
+          <a:lstStyle/>
+          <a:p>
+            <a:fld id="{CC057153-B650-4DEB-B370-79DDCFDCE934}" type="slidenum">
+              <a:rPr lang="en-US" smtClean="0"/>
+              <a:t>19</a:t>
+            </a:fld>
+            <a:endParaRPr lang="en-US"/>
+          </a:p>
+        </p:txBody>
+      </p:sp>
+    </p:spTree>
+    <p:extLst>
+      <p:ext uri="{BB962C8B-B14F-4D97-AF65-F5344CB8AC3E}">
+        <p14:creationId xmlns:p14="http://schemas.microsoft.com/office/powerpoint/2010/main" val="125997361"/>
+      </p:ext>
+    </p:extLst>
+  </p:cSld>
+  <p:clrMapOvr>
+    <a:masterClrMapping/>
+  </p:clrMapOvr>
+</p:sld>
+</file>
+
 <file path=ppt/slides/slide2.xml><?xml version="1.0" encoding="utf-8"?>
 <p:sld xmlns:a="http://schemas.openxmlformats.org/drawingml/2006/main" xmlns:r="http://schemas.openxmlformats.org/officeDocument/2006/relationships" xmlns:p="http://schemas.openxmlformats.org/presentationml/2006/main">
   <p:cSld>
@@ -7787,6 +8115,390 @@
     <p:extLst>
       <p:ext uri="{BB962C8B-B14F-4D97-AF65-F5344CB8AC3E}">
         <p14:creationId xmlns:p14="http://schemas.microsoft.com/office/powerpoint/2010/main" val="855645057"/>
+      </p:ext>
+    </p:extLst>
+  </p:cSld>
+  <p:clrMapOvr>
+    <a:masterClrMapping/>
+  </p:clrMapOvr>
+</p:sld>
+</file>
+
+<file path=ppt/slides/slide20.xml><?xml version="1.0" encoding="utf-8"?>
+<p:sld xmlns:a="http://schemas.openxmlformats.org/drawingml/2006/main" xmlns:r="http://schemas.openxmlformats.org/officeDocument/2006/relationships" xmlns:p="http://schemas.openxmlformats.org/presentationml/2006/main">
+  <p:cSld>
+    <p:spTree>
+      <p:nvGrpSpPr>
+        <p:cNvPr id="1" name="">
+          <a:extLst>
+            <a:ext uri="{FF2B5EF4-FFF2-40B4-BE49-F238E27FC236}">
+              <a16:creationId xmlns:a16="http://schemas.microsoft.com/office/drawing/2014/main" id="{54040AB8-5AA8-23D2-B9AB-055B4DA8E984}"/>
+            </a:ext>
+          </a:extLst>
+        </p:cNvPr>
+        <p:cNvGrpSpPr/>
+        <p:nvPr/>
+      </p:nvGrpSpPr>
+      <p:grpSpPr>
+        <a:xfrm>
+          <a:off x="0" y="0"/>
+          <a:ext cx="0" cy="0"/>
+          <a:chOff x="0" y="0"/>
+          <a:chExt cx="0" cy="0"/>
+        </a:xfrm>
+      </p:grpSpPr>
+      <p:sp>
+        <p:nvSpPr>
+          <p:cNvPr id="2" name="Title 1">
+            <a:extLst>
+              <a:ext uri="{FF2B5EF4-FFF2-40B4-BE49-F238E27FC236}">
+                <a16:creationId xmlns:a16="http://schemas.microsoft.com/office/drawing/2014/main" id="{CE40BA4A-BE2C-D227-CF07-6460453F3D56}"/>
+              </a:ext>
+            </a:extLst>
+          </p:cNvPr>
+          <p:cNvSpPr>
+            <a:spLocks noGrp="1"/>
+          </p:cNvSpPr>
+          <p:nvPr>
+            <p:ph type="title"/>
+          </p:nvPr>
+        </p:nvSpPr>
+        <p:spPr>
+          <a:xfrm>
+            <a:off x="612648" y="548640"/>
+            <a:ext cx="10653578" cy="830981"/>
+          </a:xfrm>
+        </p:spPr>
+        <p:txBody>
+          <a:bodyPr/>
+          <a:lstStyle/>
+          <a:p>
+            <a:r>
+              <a:rPr lang="fi-FI" dirty="0" err="1"/>
+              <a:t>Achievements</a:t>
+            </a:r>
+            <a:r>
+              <a:rPr lang="fi-FI" dirty="0"/>
+              <a:t> (</a:t>
+            </a:r>
+            <a:r>
+              <a:rPr lang="fi-FI" dirty="0" err="1"/>
+              <a:t>Self</a:t>
+            </a:r>
+            <a:r>
+              <a:rPr lang="fi-FI" dirty="0"/>
+              <a:t> </a:t>
+            </a:r>
+            <a:r>
+              <a:rPr lang="fi-FI" dirty="0" err="1"/>
+              <a:t>assessment</a:t>
+            </a:r>
+            <a:r>
+              <a:rPr lang="fi-FI" dirty="0"/>
+              <a:t>)</a:t>
+            </a:r>
+          </a:p>
+        </p:txBody>
+      </p:sp>
+      <p:sp>
+        <p:nvSpPr>
+          <p:cNvPr id="3" name="Content Placeholder 2">
+            <a:extLst>
+              <a:ext uri="{FF2B5EF4-FFF2-40B4-BE49-F238E27FC236}">
+                <a16:creationId xmlns:a16="http://schemas.microsoft.com/office/drawing/2014/main" id="{5068B31E-A21C-CA93-4D0E-0302CBF00D13}"/>
+              </a:ext>
+            </a:extLst>
+          </p:cNvPr>
+          <p:cNvSpPr>
+            <a:spLocks noGrp="1"/>
+          </p:cNvSpPr>
+          <p:nvPr>
+            <p:ph idx="1"/>
+          </p:nvPr>
+        </p:nvSpPr>
+        <p:spPr>
+          <a:xfrm>
+            <a:off x="612647" y="1379621"/>
+            <a:ext cx="10653579" cy="4929739"/>
+          </a:xfrm>
+        </p:spPr>
+        <p:txBody>
+          <a:bodyPr/>
+          <a:lstStyle/>
+          <a:p>
+            <a:r>
+              <a:rPr lang="fi-FI" dirty="0" err="1"/>
+              <a:t>Achieved</a:t>
+            </a:r>
+            <a:r>
+              <a:rPr lang="fi-FI" dirty="0"/>
+              <a:t> </a:t>
+            </a:r>
+            <a:r>
+              <a:rPr lang="fi-FI" dirty="0" err="1"/>
+              <a:t>the</a:t>
+            </a:r>
+            <a:r>
+              <a:rPr lang="fi-FI" dirty="0"/>
+              <a:t> </a:t>
+            </a:r>
+            <a:r>
+              <a:rPr lang="fi-FI" dirty="0" err="1"/>
+              <a:t>goals</a:t>
+            </a:r>
+            <a:r>
+              <a:rPr lang="fi-FI" dirty="0"/>
+              <a:t> and </a:t>
+            </a:r>
+            <a:r>
+              <a:rPr lang="fi-FI" dirty="0" err="1"/>
+              <a:t>tasks</a:t>
+            </a:r>
+            <a:r>
+              <a:rPr lang="fi-FI" dirty="0"/>
+              <a:t> </a:t>
+            </a:r>
+            <a:r>
+              <a:rPr lang="fi-FI" dirty="0" err="1"/>
+              <a:t>initially</a:t>
+            </a:r>
+            <a:r>
+              <a:rPr lang="fi-FI" dirty="0"/>
+              <a:t> set</a:t>
+            </a:r>
+          </a:p>
+          <a:p>
+            <a:r>
+              <a:rPr lang="fi-FI" dirty="0" err="1"/>
+              <a:t>The</a:t>
+            </a:r>
+            <a:r>
+              <a:rPr lang="fi-FI" dirty="0"/>
+              <a:t> </a:t>
+            </a:r>
+            <a:r>
+              <a:rPr lang="fi-FI" dirty="0" err="1"/>
+              <a:t>results</a:t>
+            </a:r>
+            <a:r>
+              <a:rPr lang="fi-FI" dirty="0"/>
+              <a:t> of </a:t>
+            </a:r>
+            <a:r>
+              <a:rPr lang="fi-FI" dirty="0" err="1"/>
+              <a:t>machine</a:t>
+            </a:r>
+            <a:r>
+              <a:rPr lang="fi-FI" dirty="0"/>
+              <a:t> </a:t>
+            </a:r>
+            <a:r>
+              <a:rPr lang="fi-FI" dirty="0" err="1"/>
+              <a:t>learning</a:t>
+            </a:r>
+            <a:r>
+              <a:rPr lang="fi-FI" dirty="0"/>
+              <a:t> </a:t>
+            </a:r>
+            <a:r>
+              <a:rPr lang="fi-FI" dirty="0" err="1"/>
+              <a:t>models</a:t>
+            </a:r>
+            <a:r>
+              <a:rPr lang="fi-FI" dirty="0"/>
+              <a:t> </a:t>
+            </a:r>
+            <a:r>
+              <a:rPr lang="fi-FI" dirty="0" err="1"/>
+              <a:t>are</a:t>
+            </a:r>
+            <a:r>
+              <a:rPr lang="fi-FI" dirty="0"/>
+              <a:t> </a:t>
+            </a:r>
+            <a:r>
+              <a:rPr lang="fi-FI" dirty="0" err="1"/>
+              <a:t>still</a:t>
+            </a:r>
+            <a:r>
+              <a:rPr lang="fi-FI" dirty="0"/>
+              <a:t> </a:t>
+            </a:r>
+            <a:r>
+              <a:rPr lang="fi-FI" dirty="0" err="1"/>
+              <a:t>not</a:t>
+            </a:r>
+            <a:r>
+              <a:rPr lang="fi-FI" dirty="0"/>
+              <a:t> </a:t>
+            </a:r>
+            <a:r>
+              <a:rPr lang="fi-FI" dirty="0" err="1"/>
+              <a:t>ideal</a:t>
+            </a:r>
+            <a:endParaRPr lang="fi-FI" dirty="0"/>
+          </a:p>
+          <a:p>
+            <a:endParaRPr lang="fi-FI" dirty="0"/>
+          </a:p>
+          <a:p>
+            <a:r>
+              <a:rPr lang="fi-FI"/>
+              <a:t>Learning</a:t>
+            </a:r>
+            <a:r>
+              <a:rPr lang="fi-FI" dirty="0"/>
+              <a:t>:</a:t>
+            </a:r>
+          </a:p>
+          <a:p>
+            <a:pPr marL="571500" lvl="1" indent="-342900">
+              <a:buFont typeface="+mj-lt"/>
+              <a:buAutoNum type="arabicPeriod"/>
+            </a:pPr>
+            <a:r>
+              <a:rPr lang="fi-FI" dirty="0"/>
+              <a:t>SQL</a:t>
+            </a:r>
+          </a:p>
+          <a:p>
+            <a:pPr marL="571500" lvl="1" indent="-342900">
+              <a:buFont typeface="+mj-lt"/>
+              <a:buAutoNum type="arabicPeriod"/>
+            </a:pPr>
+            <a:r>
+              <a:rPr lang="fi-FI" dirty="0" err="1"/>
+              <a:t>Extracting</a:t>
+            </a:r>
+            <a:r>
+              <a:rPr lang="fi-FI" dirty="0"/>
+              <a:t> </a:t>
+            </a:r>
+            <a:r>
+              <a:rPr lang="fi-FI" dirty="0" err="1"/>
+              <a:t>useful</a:t>
+            </a:r>
+            <a:r>
+              <a:rPr lang="fi-FI" dirty="0"/>
+              <a:t> and </a:t>
+            </a:r>
+            <a:r>
+              <a:rPr lang="fi-FI" dirty="0" err="1"/>
+              <a:t>complex</a:t>
+            </a:r>
+            <a:r>
+              <a:rPr lang="fi-FI" dirty="0"/>
+              <a:t> </a:t>
+            </a:r>
+            <a:r>
+              <a:rPr lang="fi-FI" dirty="0" err="1"/>
+              <a:t>insights</a:t>
+            </a:r>
+            <a:r>
+              <a:rPr lang="fi-FI" dirty="0"/>
+              <a:t> out of a  </a:t>
+            </a:r>
+            <a:r>
+              <a:rPr lang="fi-FI" dirty="0" err="1"/>
+              <a:t>seemingly</a:t>
+            </a:r>
+            <a:r>
+              <a:rPr lang="fi-FI" dirty="0"/>
+              <a:t> </a:t>
+            </a:r>
+            <a:r>
+              <a:rPr lang="fi-FI" dirty="0" err="1"/>
+              <a:t>simple</a:t>
+            </a:r>
+            <a:r>
+              <a:rPr lang="fi-FI" dirty="0"/>
+              <a:t> data</a:t>
+            </a:r>
+          </a:p>
+          <a:p>
+            <a:pPr marL="571500" lvl="1" indent="-342900">
+              <a:buFont typeface="+mj-lt"/>
+              <a:buAutoNum type="arabicPeriod"/>
+            </a:pPr>
+            <a:r>
+              <a:rPr lang="fi-FI" dirty="0" err="1"/>
+              <a:t>Implementing</a:t>
+            </a:r>
+            <a:r>
+              <a:rPr lang="fi-FI" dirty="0"/>
+              <a:t> Machine Learning </a:t>
+            </a:r>
+            <a:r>
+              <a:rPr lang="fi-FI" dirty="0" err="1"/>
+              <a:t>models</a:t>
+            </a:r>
+            <a:r>
+              <a:rPr lang="fi-FI" dirty="0"/>
+              <a:t> and </a:t>
+            </a:r>
+            <a:r>
+              <a:rPr lang="fi-FI" dirty="0" err="1"/>
+              <a:t>comparing</a:t>
+            </a:r>
+            <a:r>
+              <a:rPr lang="fi-FI" dirty="0"/>
+              <a:t> </a:t>
+            </a:r>
+            <a:r>
+              <a:rPr lang="fi-FI" dirty="0" err="1"/>
+              <a:t>results</a:t>
+            </a:r>
+            <a:endParaRPr lang="fi-FI" dirty="0"/>
+          </a:p>
+          <a:p>
+            <a:pPr marL="571500" lvl="1" indent="-342900">
+              <a:buFont typeface="+mj-lt"/>
+              <a:buAutoNum type="arabicPeriod"/>
+            </a:pPr>
+            <a:endParaRPr lang="fi-FI" dirty="0"/>
+          </a:p>
+          <a:p>
+            <a:pPr lvl="1"/>
+            <a:endParaRPr lang="fi-FI" dirty="0"/>
+          </a:p>
+          <a:p>
+            <a:endParaRPr lang="fi-FI" dirty="0"/>
+          </a:p>
+        </p:txBody>
+      </p:sp>
+      <p:sp>
+        <p:nvSpPr>
+          <p:cNvPr id="4" name="Slide Number Placeholder 3">
+            <a:extLst>
+              <a:ext uri="{FF2B5EF4-FFF2-40B4-BE49-F238E27FC236}">
+                <a16:creationId xmlns:a16="http://schemas.microsoft.com/office/drawing/2014/main" id="{E74B3B7C-43E2-5F73-6240-0555E8DD8A64}"/>
+              </a:ext>
+            </a:extLst>
+          </p:cNvPr>
+          <p:cNvSpPr>
+            <a:spLocks noGrp="1"/>
+          </p:cNvSpPr>
+          <p:nvPr>
+            <p:ph type="sldNum" sz="quarter" idx="12"/>
+          </p:nvPr>
+        </p:nvSpPr>
+        <p:spPr/>
+        <p:txBody>
+          <a:bodyPr/>
+          <a:lstStyle/>
+          <a:p>
+            <a:fld id="{CC057153-B650-4DEB-B370-79DDCFDCE934}" type="slidenum">
+              <a:rPr lang="en-US" smtClean="0"/>
+              <a:t>20</a:t>
+            </a:fld>
+            <a:endParaRPr lang="en-US"/>
+          </a:p>
+        </p:txBody>
+      </p:sp>
+    </p:spTree>
+    <p:extLst>
+      <p:ext uri="{BB962C8B-B14F-4D97-AF65-F5344CB8AC3E}">
+        <p14:creationId xmlns:p14="http://schemas.microsoft.com/office/powerpoint/2010/main" val="3476429944"/>
       </p:ext>
     </p:extLst>
   </p:cSld>

--- a/myyntidata_analyysi_07.04.pptx
+++ b/myyntidata_analyysi_07.04.pptx
@@ -5,29 +5,30 @@
     <p:sldMasterId id="2147483660" r:id="rId1"/>
   </p:sldMasterIdLst>
   <p:notesMasterIdLst>
-    <p:notesMasterId r:id="rId22"/>
+    <p:notesMasterId r:id="rId23"/>
   </p:notesMasterIdLst>
   <p:sldIdLst>
     <p:sldId id="256" r:id="rId2"/>
     <p:sldId id="257" r:id="rId3"/>
-    <p:sldId id="262" r:id="rId4"/>
-    <p:sldId id="266" r:id="rId5"/>
-    <p:sldId id="258" r:id="rId6"/>
-    <p:sldId id="259" r:id="rId7"/>
-    <p:sldId id="260" r:id="rId8"/>
-    <p:sldId id="268" r:id="rId9"/>
-    <p:sldId id="261" r:id="rId10"/>
-    <p:sldId id="269" r:id="rId11"/>
-    <p:sldId id="270" r:id="rId12"/>
-    <p:sldId id="271" r:id="rId13"/>
-    <p:sldId id="272" r:id="rId14"/>
-    <p:sldId id="273" r:id="rId15"/>
-    <p:sldId id="264" r:id="rId16"/>
-    <p:sldId id="275" r:id="rId17"/>
-    <p:sldId id="265" r:id="rId18"/>
-    <p:sldId id="274" r:id="rId19"/>
-    <p:sldId id="276" r:id="rId20"/>
-    <p:sldId id="277" r:id="rId21"/>
+    <p:sldId id="278" r:id="rId4"/>
+    <p:sldId id="262" r:id="rId5"/>
+    <p:sldId id="266" r:id="rId6"/>
+    <p:sldId id="258" r:id="rId7"/>
+    <p:sldId id="259" r:id="rId8"/>
+    <p:sldId id="260" r:id="rId9"/>
+    <p:sldId id="268" r:id="rId10"/>
+    <p:sldId id="261" r:id="rId11"/>
+    <p:sldId id="269" r:id="rId12"/>
+    <p:sldId id="270" r:id="rId13"/>
+    <p:sldId id="271" r:id="rId14"/>
+    <p:sldId id="272" r:id="rId15"/>
+    <p:sldId id="273" r:id="rId16"/>
+    <p:sldId id="264" r:id="rId17"/>
+    <p:sldId id="275" r:id="rId18"/>
+    <p:sldId id="265" r:id="rId19"/>
+    <p:sldId id="274" r:id="rId20"/>
+    <p:sldId id="276" r:id="rId21"/>
+    <p:sldId id="277" r:id="rId22"/>
   </p:sldIdLst>
   <p:sldSz cx="12192000" cy="6858000"/>
   <p:notesSz cx="6858000" cy="9144000"/>
@@ -4252,6 +4253,197 @@
           <p:cNvPr id="2" name="Title 1">
             <a:extLst>
               <a:ext uri="{FF2B5EF4-FFF2-40B4-BE49-F238E27FC236}">
+                <a16:creationId xmlns:a16="http://schemas.microsoft.com/office/drawing/2014/main" id="{F8F76E3C-D430-5B13-B197-74E630643F53}"/>
+              </a:ext>
+            </a:extLst>
+          </p:cNvPr>
+          <p:cNvSpPr>
+            <a:spLocks noGrp="1"/>
+          </p:cNvSpPr>
+          <p:nvPr>
+            <p:ph type="title"/>
+          </p:nvPr>
+        </p:nvSpPr>
+        <p:spPr>
+          <a:xfrm>
+            <a:off x="612648" y="548640"/>
+            <a:ext cx="2721102" cy="1132258"/>
+          </a:xfrm>
+        </p:spPr>
+        <p:txBody>
+          <a:bodyPr/>
+          <a:lstStyle/>
+          <a:p>
+            <a:r>
+              <a:rPr lang="fi-FI" dirty="0" err="1"/>
+              <a:t>Extracted</a:t>
+            </a:r>
+            <a:br>
+              <a:rPr lang="fi-FI" dirty="0"/>
+            </a:br>
+            <a:r>
+              <a:rPr lang="fi-FI" dirty="0" err="1"/>
+              <a:t>Insights</a:t>
+            </a:r>
+            <a:endParaRPr lang="fi-FI" dirty="0"/>
+          </a:p>
+        </p:txBody>
+      </p:sp>
+      <p:sp>
+        <p:nvSpPr>
+          <p:cNvPr id="3" name="Content Placeholder 2">
+            <a:extLst>
+              <a:ext uri="{FF2B5EF4-FFF2-40B4-BE49-F238E27FC236}">
+                <a16:creationId xmlns:a16="http://schemas.microsoft.com/office/drawing/2014/main" id="{D610DF9F-B63C-69BE-C6AF-191A549C54CA}"/>
+              </a:ext>
+            </a:extLst>
+          </p:cNvPr>
+          <p:cNvSpPr>
+            <a:spLocks noGrp="1"/>
+          </p:cNvSpPr>
+          <p:nvPr>
+            <p:ph idx="1"/>
+          </p:nvPr>
+        </p:nvSpPr>
+        <p:spPr/>
+        <p:txBody>
+          <a:bodyPr/>
+          <a:lstStyle/>
+          <a:p>
+            <a:r>
+              <a:rPr lang="fi-FI" dirty="0"/>
+              <a:t>RFM Analysis</a:t>
+            </a:r>
+          </a:p>
+          <a:p>
+            <a:r>
+              <a:rPr lang="fi-FI" dirty="0" err="1"/>
+              <a:t>Recency</a:t>
+            </a:r>
+            <a:r>
+              <a:rPr lang="fi-FI" dirty="0"/>
+              <a:t>, </a:t>
+            </a:r>
+            <a:r>
+              <a:rPr lang="fi-FI" dirty="0" err="1"/>
+              <a:t>Frequency</a:t>
+            </a:r>
+            <a:r>
+              <a:rPr lang="fi-FI" dirty="0"/>
+              <a:t>,</a:t>
+            </a:r>
+            <a:br>
+              <a:rPr lang="fi-FI" dirty="0"/>
+            </a:br>
+            <a:r>
+              <a:rPr lang="fi-FI" dirty="0" err="1"/>
+              <a:t>Monetary</a:t>
+            </a:r>
+            <a:endParaRPr lang="fi-FI" dirty="0"/>
+          </a:p>
+        </p:txBody>
+      </p:sp>
+      <p:sp>
+        <p:nvSpPr>
+          <p:cNvPr id="4" name="Slide Number Placeholder 3">
+            <a:extLst>
+              <a:ext uri="{FF2B5EF4-FFF2-40B4-BE49-F238E27FC236}">
+                <a16:creationId xmlns:a16="http://schemas.microsoft.com/office/drawing/2014/main" id="{F97DAC22-F83D-19F7-38F8-9243F04B5C8B}"/>
+              </a:ext>
+            </a:extLst>
+          </p:cNvPr>
+          <p:cNvSpPr>
+            <a:spLocks noGrp="1"/>
+          </p:cNvSpPr>
+          <p:nvPr>
+            <p:ph type="sldNum" sz="quarter" idx="12"/>
+          </p:nvPr>
+        </p:nvSpPr>
+        <p:spPr/>
+        <p:txBody>
+          <a:bodyPr/>
+          <a:lstStyle/>
+          <a:p>
+            <a:fld id="{CC057153-B650-4DEB-B370-79DDCFDCE934}" type="slidenum">
+              <a:rPr lang="en-US" smtClean="0"/>
+              <a:t>10</a:t>
+            </a:fld>
+            <a:endParaRPr lang="en-US"/>
+          </a:p>
+        </p:txBody>
+      </p:sp>
+      <p:pic>
+        <p:nvPicPr>
+          <p:cNvPr id="7" name="Picture 6">
+            <a:extLst>
+              <a:ext uri="{FF2B5EF4-FFF2-40B4-BE49-F238E27FC236}">
+                <a16:creationId xmlns:a16="http://schemas.microsoft.com/office/drawing/2014/main" id="{20F9C5CE-EB87-6F95-982C-7A45D9369BCF}"/>
+              </a:ext>
+            </a:extLst>
+          </p:cNvPr>
+          <p:cNvPicPr>
+            <a:picLocks noChangeAspect="1"/>
+          </p:cNvPicPr>
+          <p:nvPr/>
+        </p:nvPicPr>
+        <p:blipFill>
+          <a:blip r:embed="rId2">
+            <a:extLst>
+              <a:ext uri="{28A0092B-C50C-407E-A947-70E740481C1C}">
+                <a14:useLocalDpi xmlns:a14="http://schemas.microsoft.com/office/drawing/2010/main" val="0"/>
+              </a:ext>
+            </a:extLst>
+          </a:blip>
+          <a:srcRect l="587" t="947"/>
+          <a:stretch>
+            <a:fillRect/>
+          </a:stretch>
+        </p:blipFill>
+        <p:spPr>
+          <a:xfrm>
+            <a:off x="3548048" y="548640"/>
+            <a:ext cx="7718178" cy="5139197"/>
+          </a:xfrm>
+          <a:prstGeom prst="rect">
+            <a:avLst/>
+          </a:prstGeom>
+        </p:spPr>
+      </p:pic>
+    </p:spTree>
+    <p:extLst>
+      <p:ext uri="{BB962C8B-B14F-4D97-AF65-F5344CB8AC3E}">
+        <p14:creationId xmlns:p14="http://schemas.microsoft.com/office/powerpoint/2010/main" val="3013404686"/>
+      </p:ext>
+    </p:extLst>
+  </p:cSld>
+  <p:clrMapOvr>
+    <a:masterClrMapping/>
+  </p:clrMapOvr>
+</p:sld>
+</file>
+
+<file path=ppt/slides/slide11.xml><?xml version="1.0" encoding="utf-8"?>
+<p:sld xmlns:a="http://schemas.openxmlformats.org/drawingml/2006/main" xmlns:r="http://schemas.openxmlformats.org/officeDocument/2006/relationships" xmlns:p="http://schemas.openxmlformats.org/presentationml/2006/main">
+  <p:cSld>
+    <p:spTree>
+      <p:nvGrpSpPr>
+        <p:cNvPr id="1" name=""/>
+        <p:cNvGrpSpPr/>
+        <p:nvPr/>
+      </p:nvGrpSpPr>
+      <p:grpSpPr>
+        <a:xfrm>
+          <a:off x="0" y="0"/>
+          <a:ext cx="0" cy="0"/>
+          <a:chOff x="0" y="0"/>
+          <a:chExt cx="0" cy="0"/>
+        </a:xfrm>
+      </p:grpSpPr>
+      <p:sp>
+        <p:nvSpPr>
+          <p:cNvPr id="2" name="Title 1">
+            <a:extLst>
+              <a:ext uri="{FF2B5EF4-FFF2-40B4-BE49-F238E27FC236}">
                 <a16:creationId xmlns:a16="http://schemas.microsoft.com/office/drawing/2014/main" id="{DA30C949-9FAA-DD86-406C-A897C13D9581}"/>
               </a:ext>
             </a:extLst>
@@ -4485,7 +4677,7 @@
           <a:p>
             <a:fld id="{CC057153-B650-4DEB-B370-79DDCFDCE934}" type="slidenum">
               <a:rPr lang="en-US" smtClean="0"/>
-              <a:t>10</a:t>
+              <a:t>11</a:t>
             </a:fld>
             <a:endParaRPr lang="en-US"/>
           </a:p>
@@ -4762,7 +4954,7 @@
 </p:sld>
 </file>
 
-<file path=ppt/slides/slide11.xml><?xml version="1.0" encoding="utf-8"?>
+<file path=ppt/slides/slide12.xml><?xml version="1.0" encoding="utf-8"?>
 <p:sld xmlns:a="http://schemas.openxmlformats.org/drawingml/2006/main" xmlns:r="http://schemas.openxmlformats.org/officeDocument/2006/relationships" xmlns:p="http://schemas.openxmlformats.org/presentationml/2006/main">
   <p:cSld>
     <p:spTree>
@@ -5062,7 +5254,7 @@
           <a:p>
             <a:fld id="{CC057153-B650-4DEB-B370-79DDCFDCE934}" type="slidenum">
               <a:rPr lang="en-US" smtClean="0"/>
-              <a:t>11</a:t>
+              <a:t>12</a:t>
             </a:fld>
             <a:endParaRPr lang="en-US"/>
           </a:p>
@@ -5081,7 +5273,7 @@
 </p:sld>
 </file>
 
-<file path=ppt/slides/slide12.xml><?xml version="1.0" encoding="utf-8"?>
+<file path=ppt/slides/slide13.xml><?xml version="1.0" encoding="utf-8"?>
 <p:sld xmlns:a="http://schemas.openxmlformats.org/drawingml/2006/main" xmlns:r="http://schemas.openxmlformats.org/officeDocument/2006/relationships" xmlns:p="http://schemas.openxmlformats.org/presentationml/2006/main">
   <p:cSld>
     <p:bg>
@@ -5588,7 +5780,7 @@
                   <a:spcPts val="600"/>
                 </a:spcAft>
               </a:pPr>
-              <a:t>12</a:t>
+              <a:t>13</a:t>
             </a:fld>
             <a:endParaRPr lang="en-US"/>
           </a:p>
@@ -5607,7 +5799,7 @@
 </p:sld>
 </file>
 
-<file path=ppt/slides/slide13.xml><?xml version="1.0" encoding="utf-8"?>
+<file path=ppt/slides/slide14.xml><?xml version="1.0" encoding="utf-8"?>
 <p:sld xmlns:a="http://schemas.openxmlformats.org/drawingml/2006/main" xmlns:r="http://schemas.openxmlformats.org/officeDocument/2006/relationships" xmlns:p="http://schemas.openxmlformats.org/presentationml/2006/main">
   <p:cSld>
     <p:bg>
@@ -5918,7 +6110,7 @@
                   <a:spcPts val="600"/>
                 </a:spcAft>
               </a:pPr>
-              <a:t>13</a:t>
+              <a:t>14</a:t>
             </a:fld>
             <a:endParaRPr lang="en-US"/>
           </a:p>
@@ -5937,7 +6129,7 @@
 </p:sld>
 </file>
 
-<file path=ppt/slides/slide14.xml><?xml version="1.0" encoding="utf-8"?>
+<file path=ppt/slides/slide15.xml><?xml version="1.0" encoding="utf-8"?>
 <p:sld xmlns:a="http://schemas.openxmlformats.org/drawingml/2006/main" xmlns:r="http://schemas.openxmlformats.org/officeDocument/2006/relationships" xmlns:p="http://schemas.openxmlformats.org/presentationml/2006/main">
   <p:cSld>
     <p:bg>
@@ -6143,7 +6335,7 @@
                   <a:spcPts val="600"/>
                 </a:spcAft>
               </a:pPr>
-              <a:t>14</a:t>
+              <a:t>15</a:t>
             </a:fld>
             <a:endParaRPr lang="en-US"/>
           </a:p>
@@ -6281,7 +6473,7 @@
 </p:sld>
 </file>
 
-<file path=ppt/slides/slide15.xml><?xml version="1.0" encoding="utf-8"?>
+<file path=ppt/slides/slide16.xml><?xml version="1.0" encoding="utf-8"?>
 <p:sld xmlns:a="http://schemas.openxmlformats.org/drawingml/2006/main" xmlns:r="http://schemas.openxmlformats.org/officeDocument/2006/relationships" xmlns:p="http://schemas.openxmlformats.org/presentationml/2006/main">
   <p:cSld>
     <p:spTree>
@@ -6354,7 +6546,7 @@
           <a:p>
             <a:fld id="{CC057153-B650-4DEB-B370-79DDCFDCE934}" type="slidenum">
               <a:rPr lang="en-US" smtClean="0"/>
-              <a:t>15</a:t>
+              <a:t>16</a:t>
             </a:fld>
             <a:endParaRPr lang="en-US"/>
           </a:p>
@@ -6485,7 +6677,7 @@
 </p:sld>
 </file>
 
-<file path=ppt/slides/slide16.xml><?xml version="1.0" encoding="utf-8"?>
+<file path=ppt/slides/slide17.xml><?xml version="1.0" encoding="utf-8"?>
 <p:sld xmlns:a="http://schemas.openxmlformats.org/drawingml/2006/main" xmlns:r="http://schemas.openxmlformats.org/officeDocument/2006/relationships" xmlns:p="http://schemas.openxmlformats.org/presentationml/2006/main">
   <p:cSld>
     <p:bg>
@@ -6798,7 +6990,7 @@
                   <a:spcPts val="600"/>
                 </a:spcAft>
               </a:pPr>
-              <a:t>16</a:t>
+              <a:t>17</a:t>
             </a:fld>
             <a:endParaRPr lang="en-US"/>
           </a:p>
@@ -6847,7 +7039,7 @@
 </p:sld>
 </file>
 
-<file path=ppt/slides/slide17.xml><?xml version="1.0" encoding="utf-8"?>
+<file path=ppt/slides/slide18.xml><?xml version="1.0" encoding="utf-8"?>
 <p:sld xmlns:a="http://schemas.openxmlformats.org/drawingml/2006/main" xmlns:r="http://schemas.openxmlformats.org/officeDocument/2006/relationships" xmlns:p="http://schemas.openxmlformats.org/presentationml/2006/main">
   <p:cSld>
     <p:spTree>
@@ -6957,7 +7149,7 @@
           <a:p>
             <a:fld id="{CC057153-B650-4DEB-B370-79DDCFDCE934}" type="slidenum">
               <a:rPr lang="en-US" smtClean="0"/>
-              <a:t>17</a:t>
+              <a:t>18</a:t>
             </a:fld>
             <a:endParaRPr lang="en-US"/>
           </a:p>
@@ -7103,7 +7295,7 @@
 </p:sld>
 </file>
 
-<file path=ppt/slides/slide18.xml><?xml version="1.0" encoding="utf-8"?>
+<file path=ppt/slides/slide19.xml><?xml version="1.0" encoding="utf-8"?>
 <p:sld xmlns:a="http://schemas.openxmlformats.org/drawingml/2006/main" xmlns:r="http://schemas.openxmlformats.org/officeDocument/2006/relationships" xmlns:p="http://schemas.openxmlformats.org/presentationml/2006/main">
   <p:cSld>
     <p:spTree>
@@ -7193,7 +7385,7 @@
           <a:p>
             <a:fld id="{CC057153-B650-4DEB-B370-79DDCFDCE934}" type="slidenum">
               <a:rPr lang="en-US" smtClean="0"/>
-              <a:t>18</a:t>
+              <a:t>19</a:t>
             </a:fld>
             <a:endParaRPr lang="en-US"/>
           </a:p>
@@ -7417,332 +7609,6 @@
     <p:extLst>
       <p:ext uri="{BB962C8B-B14F-4D97-AF65-F5344CB8AC3E}">
         <p14:creationId xmlns:p14="http://schemas.microsoft.com/office/powerpoint/2010/main" val="3006000774"/>
-      </p:ext>
-    </p:extLst>
-  </p:cSld>
-  <p:clrMapOvr>
-    <a:masterClrMapping/>
-  </p:clrMapOvr>
-</p:sld>
-</file>
-
-<file path=ppt/slides/slide19.xml><?xml version="1.0" encoding="utf-8"?>
-<p:sld xmlns:a="http://schemas.openxmlformats.org/drawingml/2006/main" xmlns:r="http://schemas.openxmlformats.org/officeDocument/2006/relationships" xmlns:p="http://schemas.openxmlformats.org/presentationml/2006/main">
-  <p:cSld>
-    <p:spTree>
-      <p:nvGrpSpPr>
-        <p:cNvPr id="1" name=""/>
-        <p:cNvGrpSpPr/>
-        <p:nvPr/>
-      </p:nvGrpSpPr>
-      <p:grpSpPr>
-        <a:xfrm>
-          <a:off x="0" y="0"/>
-          <a:ext cx="0" cy="0"/>
-          <a:chOff x="0" y="0"/>
-          <a:chExt cx="0" cy="0"/>
-        </a:xfrm>
-      </p:grpSpPr>
-      <p:sp>
-        <p:nvSpPr>
-          <p:cNvPr id="2" name="Title 1">
-            <a:extLst>
-              <a:ext uri="{FF2B5EF4-FFF2-40B4-BE49-F238E27FC236}">
-                <a16:creationId xmlns:a16="http://schemas.microsoft.com/office/drawing/2014/main" id="{326E0F70-94D9-D6BD-6355-30FB6DD336CD}"/>
-              </a:ext>
-            </a:extLst>
-          </p:cNvPr>
-          <p:cNvSpPr>
-            <a:spLocks noGrp="1"/>
-          </p:cNvSpPr>
-          <p:nvPr>
-            <p:ph type="title"/>
-          </p:nvPr>
-        </p:nvSpPr>
-        <p:spPr>
-          <a:xfrm>
-            <a:off x="612648" y="548640"/>
-            <a:ext cx="10653578" cy="830981"/>
-          </a:xfrm>
-        </p:spPr>
-        <p:txBody>
-          <a:bodyPr/>
-          <a:lstStyle/>
-          <a:p>
-            <a:r>
-              <a:rPr lang="fi-FI" dirty="0" err="1"/>
-              <a:t>Challenges</a:t>
-            </a:r>
-            <a:endParaRPr lang="fi-FI" dirty="0"/>
-          </a:p>
-        </p:txBody>
-      </p:sp>
-      <p:sp>
-        <p:nvSpPr>
-          <p:cNvPr id="3" name="Content Placeholder 2">
-            <a:extLst>
-              <a:ext uri="{FF2B5EF4-FFF2-40B4-BE49-F238E27FC236}">
-                <a16:creationId xmlns:a16="http://schemas.microsoft.com/office/drawing/2014/main" id="{52FDD597-C721-E76A-72E5-07350D7F3DA4}"/>
-              </a:ext>
-            </a:extLst>
-          </p:cNvPr>
-          <p:cNvSpPr>
-            <a:spLocks noGrp="1"/>
-          </p:cNvSpPr>
-          <p:nvPr>
-            <p:ph idx="1"/>
-          </p:nvPr>
-        </p:nvSpPr>
-        <p:spPr>
-          <a:xfrm>
-            <a:off x="612647" y="1379621"/>
-            <a:ext cx="10653579" cy="4929739"/>
-          </a:xfrm>
-        </p:spPr>
-        <p:txBody>
-          <a:bodyPr/>
-          <a:lstStyle/>
-          <a:p>
-            <a:r>
-              <a:rPr lang="fi-FI" dirty="0"/>
-              <a:t>A </a:t>
-            </a:r>
-            <a:r>
-              <a:rPr lang="fi-FI" dirty="0" err="1"/>
-              <a:t>lot</a:t>
-            </a:r>
-            <a:r>
-              <a:rPr lang="fi-FI" dirty="0"/>
-              <a:t> of </a:t>
-            </a:r>
-            <a:r>
-              <a:rPr lang="fi-FI" dirty="0" err="1"/>
-              <a:t>noise</a:t>
-            </a:r>
-            <a:r>
-              <a:rPr lang="fi-FI" dirty="0"/>
-              <a:t> in </a:t>
-            </a:r>
-            <a:r>
-              <a:rPr lang="fi-FI" dirty="0" err="1"/>
-              <a:t>the</a:t>
-            </a:r>
-            <a:r>
-              <a:rPr lang="fi-FI" dirty="0"/>
-              <a:t> </a:t>
-            </a:r>
-            <a:r>
-              <a:rPr lang="fi-FI" dirty="0" err="1"/>
-              <a:t>customer</a:t>
-            </a:r>
-            <a:r>
-              <a:rPr lang="fi-FI" dirty="0"/>
-              <a:t> data</a:t>
-            </a:r>
-          </a:p>
-          <a:p>
-            <a:r>
-              <a:rPr lang="fi-FI" dirty="0" err="1"/>
-              <a:t>Figuring</a:t>
-            </a:r>
-            <a:r>
-              <a:rPr lang="fi-FI" dirty="0"/>
-              <a:t> out </a:t>
-            </a:r>
-            <a:r>
-              <a:rPr lang="fi-FI" dirty="0" err="1"/>
-              <a:t>what</a:t>
-            </a:r>
-            <a:r>
-              <a:rPr lang="fi-FI" dirty="0"/>
-              <a:t> </a:t>
-            </a:r>
-            <a:r>
-              <a:rPr lang="fi-FI" dirty="0" err="1"/>
-              <a:t>actually</a:t>
-            </a:r>
-            <a:r>
-              <a:rPr lang="fi-FI" dirty="0"/>
-              <a:t> is </a:t>
-            </a:r>
-            <a:r>
-              <a:rPr lang="fi-FI" dirty="0" err="1"/>
-              <a:t>affecting</a:t>
-            </a:r>
-            <a:r>
-              <a:rPr lang="fi-FI" dirty="0"/>
-              <a:t> </a:t>
-            </a:r>
-            <a:r>
-              <a:rPr lang="fi-FI" dirty="0" err="1"/>
-              <a:t>the</a:t>
-            </a:r>
-            <a:r>
-              <a:rPr lang="fi-FI" dirty="0"/>
-              <a:t> data</a:t>
-            </a:r>
-          </a:p>
-          <a:p>
-            <a:r>
-              <a:rPr lang="fi-FI" dirty="0" err="1"/>
-              <a:t>Cleaning</a:t>
-            </a:r>
-            <a:r>
-              <a:rPr lang="fi-FI" dirty="0"/>
-              <a:t> </a:t>
-            </a:r>
-            <a:r>
-              <a:rPr lang="fi-FI" dirty="0" err="1"/>
-              <a:t>the</a:t>
-            </a:r>
-            <a:r>
-              <a:rPr lang="fi-FI" dirty="0"/>
-              <a:t> </a:t>
-            </a:r>
-            <a:r>
-              <a:rPr lang="fi-FI" dirty="0" err="1"/>
-              <a:t>features</a:t>
-            </a:r>
-            <a:r>
-              <a:rPr lang="fi-FI" dirty="0"/>
-              <a:t> and </a:t>
-            </a:r>
-            <a:r>
-              <a:rPr lang="fi-FI" dirty="0" err="1"/>
-              <a:t>deciding</a:t>
-            </a:r>
-            <a:r>
-              <a:rPr lang="fi-FI" dirty="0"/>
-              <a:t> </a:t>
-            </a:r>
-            <a:r>
-              <a:rPr lang="fi-FI" dirty="0" err="1"/>
-              <a:t>which</a:t>
-            </a:r>
-            <a:r>
-              <a:rPr lang="fi-FI" dirty="0"/>
-              <a:t> </a:t>
-            </a:r>
-            <a:r>
-              <a:rPr lang="fi-FI" dirty="0" err="1"/>
-              <a:t>cleaned</a:t>
-            </a:r>
-            <a:r>
-              <a:rPr lang="fi-FI" dirty="0"/>
-              <a:t> </a:t>
-            </a:r>
-            <a:r>
-              <a:rPr lang="fi-FI" dirty="0" err="1"/>
-              <a:t>features</a:t>
-            </a:r>
-            <a:r>
-              <a:rPr lang="fi-FI" dirty="0"/>
-              <a:t> to </a:t>
-            </a:r>
-            <a:r>
-              <a:rPr lang="fi-FI" dirty="0" err="1"/>
-              <a:t>keep</a:t>
-            </a:r>
-            <a:endParaRPr lang="fi-FI" dirty="0"/>
-          </a:p>
-          <a:p>
-            <a:r>
-              <a:rPr lang="fi-FI" dirty="0" err="1"/>
-              <a:t>Extracting</a:t>
-            </a:r>
-            <a:r>
-              <a:rPr lang="fi-FI" dirty="0"/>
-              <a:t> </a:t>
-            </a:r>
-            <a:r>
-              <a:rPr lang="fi-FI" dirty="0" err="1"/>
-              <a:t>useful</a:t>
-            </a:r>
-            <a:r>
-              <a:rPr lang="fi-FI" dirty="0"/>
-              <a:t> </a:t>
-            </a:r>
-            <a:r>
-              <a:rPr lang="fi-FI" dirty="0" err="1"/>
-              <a:t>customer</a:t>
-            </a:r>
-            <a:r>
-              <a:rPr lang="fi-FI" dirty="0"/>
-              <a:t> </a:t>
-            </a:r>
-            <a:r>
-              <a:rPr lang="fi-FI" dirty="0" err="1"/>
-              <a:t>insights</a:t>
-            </a:r>
-            <a:r>
-              <a:rPr lang="fi-FI" dirty="0"/>
-              <a:t> </a:t>
-            </a:r>
-            <a:r>
-              <a:rPr lang="fi-FI" dirty="0" err="1"/>
-              <a:t>from</a:t>
-            </a:r>
-            <a:r>
-              <a:rPr lang="fi-FI" dirty="0"/>
-              <a:t> </a:t>
-            </a:r>
-            <a:r>
-              <a:rPr lang="fi-FI" dirty="0" err="1"/>
-              <a:t>the</a:t>
-            </a:r>
-            <a:r>
-              <a:rPr lang="fi-FI" dirty="0"/>
-              <a:t> </a:t>
-            </a:r>
-            <a:r>
-              <a:rPr lang="fi-FI" dirty="0" err="1"/>
-              <a:t>selected</a:t>
-            </a:r>
-            <a:r>
-              <a:rPr lang="fi-FI" dirty="0"/>
-              <a:t> </a:t>
-            </a:r>
-            <a:r>
-              <a:rPr lang="fi-FI" dirty="0" err="1"/>
-              <a:t>features</a:t>
-            </a:r>
-            <a:endParaRPr lang="fi-FI" dirty="0"/>
-          </a:p>
-        </p:txBody>
-      </p:sp>
-      <p:sp>
-        <p:nvSpPr>
-          <p:cNvPr id="4" name="Slide Number Placeholder 3">
-            <a:extLst>
-              <a:ext uri="{FF2B5EF4-FFF2-40B4-BE49-F238E27FC236}">
-                <a16:creationId xmlns:a16="http://schemas.microsoft.com/office/drawing/2014/main" id="{C164E8C2-6E51-14D0-AA9B-4EFFC09DA818}"/>
-              </a:ext>
-            </a:extLst>
-          </p:cNvPr>
-          <p:cNvSpPr>
-            <a:spLocks noGrp="1"/>
-          </p:cNvSpPr>
-          <p:nvPr>
-            <p:ph type="sldNum" sz="quarter" idx="12"/>
-          </p:nvPr>
-        </p:nvSpPr>
-        <p:spPr/>
-        <p:txBody>
-          <a:bodyPr/>
-          <a:lstStyle/>
-          <a:p>
-            <a:fld id="{CC057153-B650-4DEB-B370-79DDCFDCE934}" type="slidenum">
-              <a:rPr lang="en-US" smtClean="0"/>
-              <a:t>19</a:t>
-            </a:fld>
-            <a:endParaRPr lang="en-US"/>
-          </a:p>
-        </p:txBody>
-      </p:sp>
-    </p:spTree>
-    <p:extLst>
-      <p:ext uri="{BB962C8B-B14F-4D97-AF65-F5344CB8AC3E}">
-        <p14:creationId xmlns:p14="http://schemas.microsoft.com/office/powerpoint/2010/main" val="125997361"/>
       </p:ext>
     </p:extLst>
   </p:cSld>
@@ -7797,20 +7663,9 @@
           <a:p>
             <a:r>
               <a:rPr lang="fi-FI" dirty="0" err="1"/>
-              <a:t>About</a:t>
-            </a:r>
-            <a:r>
-              <a:rPr lang="fi-FI" dirty="0"/>
-              <a:t> </a:t>
-            </a:r>
-            <a:r>
-              <a:rPr lang="fi-FI" dirty="0" err="1"/>
-              <a:t>the</a:t>
-            </a:r>
-            <a:r>
-              <a:rPr lang="fi-FI" dirty="0"/>
-              <a:t> data</a:t>
-            </a:r>
+              <a:t>Goals</a:t>
+            </a:r>
+            <a:endParaRPr lang="fi-FI" dirty="0"/>
           </a:p>
         </p:txBody>
       </p:sp>
@@ -7850,26 +7705,11 @@
             </a:r>
             <a:r>
               <a:rPr lang="fi-FI" dirty="0" err="1"/>
-              <a:t>build</a:t>
-            </a:r>
-            <a:r>
-              <a:rPr lang="fi-FI" dirty="0"/>
-              <a:t> </a:t>
-            </a:r>
-            <a:r>
-              <a:rPr lang="fi-FI" dirty="0" err="1"/>
-              <a:t>predictions</a:t>
-            </a:r>
-            <a:br>
-              <a:rPr lang="fi-FI" dirty="0"/>
-            </a:br>
-            <a:r>
-              <a:rPr lang="fi-FI" dirty="0" err="1"/>
-              <a:t>based</a:t>
-            </a:r>
-            <a:r>
-              <a:rPr lang="fi-FI" dirty="0"/>
-              <a:t> on </a:t>
+              <a:t>clean</a:t>
+            </a:r>
+            <a:r>
+              <a:rPr lang="fi-FI" dirty="0"/>
+              <a:t> </a:t>
             </a:r>
             <a:r>
               <a:rPr lang="fi-FI" dirty="0" err="1"/>
@@ -7877,146 +7717,21 @@
             </a:r>
             <a:r>
               <a:rPr lang="fi-FI" dirty="0"/>
-              <a:t> </a:t>
-            </a:r>
-            <a:r>
-              <a:rPr lang="fi-FI" dirty="0" err="1"/>
-              <a:t>Sales</a:t>
-            </a:r>
-            <a:r>
-              <a:rPr lang="fi-FI" dirty="0"/>
-              <a:t> Data</a:t>
-            </a:r>
-          </a:p>
-          <a:p>
-            <a:r>
-              <a:rPr lang="fi-FI" dirty="0"/>
-              <a:t>Dataset </a:t>
-            </a:r>
-            <a:r>
-              <a:rPr lang="fi-FI" dirty="0" err="1"/>
-              <a:t>obtained</a:t>
-            </a:r>
-            <a:r>
-              <a:rPr lang="fi-FI" dirty="0"/>
-              <a:t> </a:t>
-            </a:r>
-            <a:r>
-              <a:rPr lang="fi-FI" dirty="0" err="1"/>
-              <a:t>from</a:t>
-            </a:r>
-            <a:r>
-              <a:rPr lang="fi-FI" dirty="0"/>
-              <a:t> </a:t>
-            </a:r>
-            <a:r>
-              <a:rPr lang="fi-FI" dirty="0" err="1"/>
-              <a:t>Kaggle</a:t>
-            </a:r>
-            <a:r>
-              <a:rPr lang="fi-FI" dirty="0"/>
-              <a:t>,</a:t>
-            </a:r>
-            <a:br>
-              <a:rPr lang="fi-FI" dirty="0"/>
-            </a:br>
-            <a:r>
-              <a:rPr lang="fi-FI" dirty="0" err="1"/>
-              <a:t>contains</a:t>
-            </a:r>
-            <a:r>
-              <a:rPr lang="fi-FI" dirty="0"/>
-              <a:t> </a:t>
-            </a:r>
-            <a:r>
-              <a:rPr lang="fi-FI" dirty="0" err="1"/>
-              <a:t>customer</a:t>
-            </a:r>
-            <a:br>
-              <a:rPr lang="fi-FI" dirty="0"/>
-            </a:br>
-            <a:r>
-              <a:rPr lang="fi-FI" dirty="0" err="1"/>
-              <a:t>segmentation</a:t>
-            </a:r>
-            <a:r>
-              <a:rPr lang="fi-FI" dirty="0"/>
-              <a:t> </a:t>
-            </a:r>
-            <a:r>
-              <a:rPr lang="fi-FI" dirty="0" err="1"/>
-              <a:t>details</a:t>
-            </a:r>
-            <a:endParaRPr lang="fi-FI" dirty="0"/>
-          </a:p>
-          <a:p>
-            <a:r>
-              <a:rPr lang="fi-FI" dirty="0"/>
-              <a:t>~542k </a:t>
-            </a:r>
-            <a:r>
-              <a:rPr lang="fi-FI" dirty="0" err="1"/>
-              <a:t>rows</a:t>
-            </a:r>
-            <a:endParaRPr lang="fi-FI" dirty="0"/>
-          </a:p>
-          <a:p>
-            <a:r>
-              <a:rPr lang="fi-FI" dirty="0" err="1"/>
-              <a:t>Ordering</a:t>
-            </a:r>
-            <a:r>
-              <a:rPr lang="fi-FI" dirty="0"/>
-              <a:t> </a:t>
-            </a:r>
-            <a:r>
-              <a:rPr lang="fi-FI" dirty="0" err="1"/>
-              <a:t>countries</a:t>
-            </a:r>
-            <a:r>
-              <a:rPr lang="fi-FI" dirty="0"/>
-              <a:t> </a:t>
-            </a:r>
-            <a:r>
-              <a:rPr lang="fi-FI" dirty="0" err="1"/>
-              <a:t>mainly</a:t>
-            </a:r>
-            <a:r>
-              <a:rPr lang="fi-FI" dirty="0"/>
-              <a:t> in</a:t>
-            </a:r>
-            <a:br>
-              <a:rPr lang="fi-FI" dirty="0"/>
-            </a:br>
-            <a:r>
-              <a:rPr lang="fi-FI" dirty="0"/>
-              <a:t>Europe/UK</a:t>
-            </a:r>
-          </a:p>
-          <a:p>
-            <a:r>
-              <a:rPr lang="fi-FI" dirty="0"/>
-              <a:t>4367 </a:t>
-            </a:r>
-            <a:r>
-              <a:rPr lang="fi-FI" dirty="0" err="1"/>
-              <a:t>customers</a:t>
-            </a:r>
-            <a:r>
-              <a:rPr lang="fi-FI" dirty="0"/>
-              <a:t>, </a:t>
-            </a:r>
-            <a:r>
-              <a:rPr lang="fi-FI" dirty="0" err="1"/>
-              <a:t>later</a:t>
-            </a:r>
-            <a:r>
-              <a:rPr lang="fi-FI" dirty="0"/>
-              <a:t> </a:t>
-            </a:r>
-            <a:r>
-              <a:rPr lang="fi-FI" dirty="0" err="1"/>
-              <a:t>cleaned</a:t>
+              <a:t> data (Python)</a:t>
+            </a:r>
+          </a:p>
+          <a:p>
+            <a:r>
+              <a:rPr lang="fi-FI" dirty="0" err="1"/>
+              <a:t>Extract</a:t>
+            </a:r>
+            <a:r>
+              <a:rPr lang="fi-FI" dirty="0"/>
+              <a:t> </a:t>
+            </a:r>
+            <a:r>
+              <a:rPr lang="fi-FI" dirty="0" err="1"/>
+              <a:t>insight</a:t>
             </a:r>
             <a:r>
               <a:rPr lang="fi-FI" dirty="0"/>
@@ -8024,25 +7739,72 @@
             </a:r>
             <a:r>
               <a:rPr lang="fi-FI" dirty="0" err="1"/>
-              <a:t>reduced</a:t>
-            </a:r>
-            <a:r>
-              <a:rPr lang="fi-FI" dirty="0"/>
-              <a:t> to 4315 for </a:t>
-            </a:r>
-            <a:r>
-              <a:rPr lang="fi-FI" dirty="0" err="1"/>
-              <a:t>improved</a:t>
-            </a:r>
-            <a:r>
-              <a:rPr lang="fi-FI" dirty="0"/>
-              <a:t> feature </a:t>
-            </a:r>
-            <a:r>
-              <a:rPr lang="fi-FI" dirty="0" err="1"/>
-              <a:t>extraction</a:t>
-            </a:r>
-            <a:endParaRPr lang="fi-FI" dirty="0"/>
+              <a:t>complex</a:t>
+            </a:r>
+            <a:r>
+              <a:rPr lang="fi-FI" dirty="0"/>
+              <a:t> </a:t>
+            </a:r>
+            <a:r>
+              <a:rPr lang="fi-FI" dirty="0" err="1"/>
+              <a:t>patterns</a:t>
+            </a:r>
+            <a:r>
+              <a:rPr lang="fi-FI" dirty="0"/>
+              <a:t> (Python, SQL)</a:t>
+            </a:r>
+          </a:p>
+          <a:p>
+            <a:r>
+              <a:rPr lang="fi-FI" dirty="0" err="1"/>
+              <a:t>Use</a:t>
+            </a:r>
+            <a:r>
+              <a:rPr lang="fi-FI" dirty="0"/>
+              <a:t> Machine Learning to </a:t>
+            </a:r>
+            <a:r>
+              <a:rPr lang="fi-FI" dirty="0" err="1"/>
+              <a:t>predict</a:t>
+            </a:r>
+            <a:r>
+              <a:rPr lang="fi-FI" dirty="0"/>
+              <a:t> </a:t>
+            </a:r>
+            <a:r>
+              <a:rPr lang="fi-FI" dirty="0" err="1"/>
+              <a:t>Churn</a:t>
+            </a:r>
+            <a:r>
+              <a:rPr lang="fi-FI" dirty="0"/>
+              <a:t> (Python)</a:t>
+            </a:r>
+          </a:p>
+          <a:p>
+            <a:r>
+              <a:rPr lang="fi-FI" dirty="0" err="1"/>
+              <a:t>Visualise</a:t>
+            </a:r>
+            <a:r>
+              <a:rPr lang="fi-FI" dirty="0"/>
+              <a:t> </a:t>
+            </a:r>
+            <a:r>
+              <a:rPr lang="fi-FI" dirty="0" err="1"/>
+              <a:t>the</a:t>
+            </a:r>
+            <a:r>
+              <a:rPr lang="fi-FI" dirty="0"/>
+              <a:t> data and </a:t>
+            </a:r>
+            <a:r>
+              <a:rPr lang="fi-FI" dirty="0" err="1"/>
+              <a:t>insights</a:t>
+            </a:r>
+            <a:r>
+              <a:rPr lang="fi-FI" dirty="0"/>
+              <a:t> (Power BI)</a:t>
+            </a:r>
           </a:p>
         </p:txBody>
       </p:sp>
@@ -8075,42 +7837,6 @@
           </a:p>
         </p:txBody>
       </p:sp>
-      <p:pic>
-        <p:nvPicPr>
-          <p:cNvPr id="10" name="Picture 9">
-            <a:extLst>
-              <a:ext uri="{FF2B5EF4-FFF2-40B4-BE49-F238E27FC236}">
-                <a16:creationId xmlns:a16="http://schemas.microsoft.com/office/drawing/2014/main" id="{0F2110C9-A868-0974-3743-567ED53F0A29}"/>
-              </a:ext>
-            </a:extLst>
-          </p:cNvPr>
-          <p:cNvPicPr>
-            <a:picLocks noChangeAspect="1"/>
-          </p:cNvPicPr>
-          <p:nvPr/>
-        </p:nvPicPr>
-        <p:blipFill>
-          <a:blip r:embed="rId2">
-            <a:extLst>
-              <a:ext uri="{28A0092B-C50C-407E-A947-70E740481C1C}">
-                <a14:useLocalDpi xmlns:a14="http://schemas.microsoft.com/office/drawing/2010/main" val="0"/>
-              </a:ext>
-            </a:extLst>
-          </a:blip>
-          <a:stretch>
-            <a:fillRect/>
-          </a:stretch>
-        </p:blipFill>
-        <p:spPr>
-          <a:xfrm>
-            <a:off x="4490712" y="481965"/>
-            <a:ext cx="7460828" cy="4501515"/>
-          </a:xfrm>
-          <a:prstGeom prst="rect">
-            <a:avLst/>
-          </a:prstGeom>
-        </p:spPr>
-      </p:pic>
     </p:spTree>
     <p:extLst>
       <p:ext uri="{BB962C8B-B14F-4D97-AF65-F5344CB8AC3E}">
@@ -8125,6 +7851,332 @@
 </file>
 
 <file path=ppt/slides/slide20.xml><?xml version="1.0" encoding="utf-8"?>
+<p:sld xmlns:a="http://schemas.openxmlformats.org/drawingml/2006/main" xmlns:r="http://schemas.openxmlformats.org/officeDocument/2006/relationships" xmlns:p="http://schemas.openxmlformats.org/presentationml/2006/main">
+  <p:cSld>
+    <p:spTree>
+      <p:nvGrpSpPr>
+        <p:cNvPr id="1" name=""/>
+        <p:cNvGrpSpPr/>
+        <p:nvPr/>
+      </p:nvGrpSpPr>
+      <p:grpSpPr>
+        <a:xfrm>
+          <a:off x="0" y="0"/>
+          <a:ext cx="0" cy="0"/>
+          <a:chOff x="0" y="0"/>
+          <a:chExt cx="0" cy="0"/>
+        </a:xfrm>
+      </p:grpSpPr>
+      <p:sp>
+        <p:nvSpPr>
+          <p:cNvPr id="2" name="Title 1">
+            <a:extLst>
+              <a:ext uri="{FF2B5EF4-FFF2-40B4-BE49-F238E27FC236}">
+                <a16:creationId xmlns:a16="http://schemas.microsoft.com/office/drawing/2014/main" id="{326E0F70-94D9-D6BD-6355-30FB6DD336CD}"/>
+              </a:ext>
+            </a:extLst>
+          </p:cNvPr>
+          <p:cNvSpPr>
+            <a:spLocks noGrp="1"/>
+          </p:cNvSpPr>
+          <p:nvPr>
+            <p:ph type="title"/>
+          </p:nvPr>
+        </p:nvSpPr>
+        <p:spPr>
+          <a:xfrm>
+            <a:off x="612648" y="548640"/>
+            <a:ext cx="10653578" cy="830981"/>
+          </a:xfrm>
+        </p:spPr>
+        <p:txBody>
+          <a:bodyPr/>
+          <a:lstStyle/>
+          <a:p>
+            <a:r>
+              <a:rPr lang="fi-FI" dirty="0" err="1"/>
+              <a:t>Challenges</a:t>
+            </a:r>
+            <a:endParaRPr lang="fi-FI" dirty="0"/>
+          </a:p>
+        </p:txBody>
+      </p:sp>
+      <p:sp>
+        <p:nvSpPr>
+          <p:cNvPr id="3" name="Content Placeholder 2">
+            <a:extLst>
+              <a:ext uri="{FF2B5EF4-FFF2-40B4-BE49-F238E27FC236}">
+                <a16:creationId xmlns:a16="http://schemas.microsoft.com/office/drawing/2014/main" id="{52FDD597-C721-E76A-72E5-07350D7F3DA4}"/>
+              </a:ext>
+            </a:extLst>
+          </p:cNvPr>
+          <p:cNvSpPr>
+            <a:spLocks noGrp="1"/>
+          </p:cNvSpPr>
+          <p:nvPr>
+            <p:ph idx="1"/>
+          </p:nvPr>
+        </p:nvSpPr>
+        <p:spPr>
+          <a:xfrm>
+            <a:off x="612647" y="1379621"/>
+            <a:ext cx="10653579" cy="4929739"/>
+          </a:xfrm>
+        </p:spPr>
+        <p:txBody>
+          <a:bodyPr/>
+          <a:lstStyle/>
+          <a:p>
+            <a:r>
+              <a:rPr lang="fi-FI" dirty="0"/>
+              <a:t>A </a:t>
+            </a:r>
+            <a:r>
+              <a:rPr lang="fi-FI" dirty="0" err="1"/>
+              <a:t>lot</a:t>
+            </a:r>
+            <a:r>
+              <a:rPr lang="fi-FI" dirty="0"/>
+              <a:t> of </a:t>
+            </a:r>
+            <a:r>
+              <a:rPr lang="fi-FI" dirty="0" err="1"/>
+              <a:t>noise</a:t>
+            </a:r>
+            <a:r>
+              <a:rPr lang="fi-FI" dirty="0"/>
+              <a:t> in </a:t>
+            </a:r>
+            <a:r>
+              <a:rPr lang="fi-FI" dirty="0" err="1"/>
+              <a:t>the</a:t>
+            </a:r>
+            <a:r>
+              <a:rPr lang="fi-FI" dirty="0"/>
+              <a:t> </a:t>
+            </a:r>
+            <a:r>
+              <a:rPr lang="fi-FI" dirty="0" err="1"/>
+              <a:t>customer</a:t>
+            </a:r>
+            <a:r>
+              <a:rPr lang="fi-FI" dirty="0"/>
+              <a:t> data</a:t>
+            </a:r>
+          </a:p>
+          <a:p>
+            <a:r>
+              <a:rPr lang="fi-FI" dirty="0" err="1"/>
+              <a:t>Figuring</a:t>
+            </a:r>
+            <a:r>
+              <a:rPr lang="fi-FI" dirty="0"/>
+              <a:t> out </a:t>
+            </a:r>
+            <a:r>
+              <a:rPr lang="fi-FI" dirty="0" err="1"/>
+              <a:t>what</a:t>
+            </a:r>
+            <a:r>
+              <a:rPr lang="fi-FI" dirty="0"/>
+              <a:t> </a:t>
+            </a:r>
+            <a:r>
+              <a:rPr lang="fi-FI" dirty="0" err="1"/>
+              <a:t>actually</a:t>
+            </a:r>
+            <a:r>
+              <a:rPr lang="fi-FI" dirty="0"/>
+              <a:t> is </a:t>
+            </a:r>
+            <a:r>
+              <a:rPr lang="fi-FI" dirty="0" err="1"/>
+              <a:t>affecting</a:t>
+            </a:r>
+            <a:r>
+              <a:rPr lang="fi-FI" dirty="0"/>
+              <a:t> </a:t>
+            </a:r>
+            <a:r>
+              <a:rPr lang="fi-FI" dirty="0" err="1"/>
+              <a:t>the</a:t>
+            </a:r>
+            <a:r>
+              <a:rPr lang="fi-FI" dirty="0"/>
+              <a:t> data</a:t>
+            </a:r>
+          </a:p>
+          <a:p>
+            <a:r>
+              <a:rPr lang="fi-FI" dirty="0" err="1"/>
+              <a:t>Cleaning</a:t>
+            </a:r>
+            <a:r>
+              <a:rPr lang="fi-FI" dirty="0"/>
+              <a:t> </a:t>
+            </a:r>
+            <a:r>
+              <a:rPr lang="fi-FI" dirty="0" err="1"/>
+              <a:t>the</a:t>
+            </a:r>
+            <a:r>
+              <a:rPr lang="fi-FI" dirty="0"/>
+              <a:t> </a:t>
+            </a:r>
+            <a:r>
+              <a:rPr lang="fi-FI" dirty="0" err="1"/>
+              <a:t>features</a:t>
+            </a:r>
+            <a:r>
+              <a:rPr lang="fi-FI" dirty="0"/>
+              <a:t> and </a:t>
+            </a:r>
+            <a:r>
+              <a:rPr lang="fi-FI" dirty="0" err="1"/>
+              <a:t>deciding</a:t>
+            </a:r>
+            <a:r>
+              <a:rPr lang="fi-FI" dirty="0"/>
+              <a:t> </a:t>
+            </a:r>
+            <a:r>
+              <a:rPr lang="fi-FI" dirty="0" err="1"/>
+              <a:t>which</a:t>
+            </a:r>
+            <a:r>
+              <a:rPr lang="fi-FI" dirty="0"/>
+              <a:t> </a:t>
+            </a:r>
+            <a:r>
+              <a:rPr lang="fi-FI" dirty="0" err="1"/>
+              <a:t>cleaned</a:t>
+            </a:r>
+            <a:r>
+              <a:rPr lang="fi-FI" dirty="0"/>
+              <a:t> </a:t>
+            </a:r>
+            <a:r>
+              <a:rPr lang="fi-FI" dirty="0" err="1"/>
+              <a:t>features</a:t>
+            </a:r>
+            <a:r>
+              <a:rPr lang="fi-FI" dirty="0"/>
+              <a:t> to </a:t>
+            </a:r>
+            <a:r>
+              <a:rPr lang="fi-FI" dirty="0" err="1"/>
+              <a:t>keep</a:t>
+            </a:r>
+            <a:endParaRPr lang="fi-FI" dirty="0"/>
+          </a:p>
+          <a:p>
+            <a:r>
+              <a:rPr lang="fi-FI" dirty="0" err="1"/>
+              <a:t>Extracting</a:t>
+            </a:r>
+            <a:r>
+              <a:rPr lang="fi-FI" dirty="0"/>
+              <a:t> </a:t>
+            </a:r>
+            <a:r>
+              <a:rPr lang="fi-FI" dirty="0" err="1"/>
+              <a:t>useful</a:t>
+            </a:r>
+            <a:r>
+              <a:rPr lang="fi-FI" dirty="0"/>
+              <a:t> </a:t>
+            </a:r>
+            <a:r>
+              <a:rPr lang="fi-FI" dirty="0" err="1"/>
+              <a:t>customer</a:t>
+            </a:r>
+            <a:r>
+              <a:rPr lang="fi-FI" dirty="0"/>
+              <a:t> </a:t>
+            </a:r>
+            <a:r>
+              <a:rPr lang="fi-FI" dirty="0" err="1"/>
+              <a:t>insights</a:t>
+            </a:r>
+            <a:r>
+              <a:rPr lang="fi-FI" dirty="0"/>
+              <a:t> </a:t>
+            </a:r>
+            <a:r>
+              <a:rPr lang="fi-FI" dirty="0" err="1"/>
+              <a:t>from</a:t>
+            </a:r>
+            <a:r>
+              <a:rPr lang="fi-FI" dirty="0"/>
+              <a:t> </a:t>
+            </a:r>
+            <a:r>
+              <a:rPr lang="fi-FI" dirty="0" err="1"/>
+              <a:t>the</a:t>
+            </a:r>
+            <a:r>
+              <a:rPr lang="fi-FI" dirty="0"/>
+              <a:t> </a:t>
+            </a:r>
+            <a:r>
+              <a:rPr lang="fi-FI" dirty="0" err="1"/>
+              <a:t>selected</a:t>
+            </a:r>
+            <a:r>
+              <a:rPr lang="fi-FI" dirty="0"/>
+              <a:t> </a:t>
+            </a:r>
+            <a:r>
+              <a:rPr lang="fi-FI" dirty="0" err="1"/>
+              <a:t>features</a:t>
+            </a:r>
+            <a:endParaRPr lang="fi-FI" dirty="0"/>
+          </a:p>
+        </p:txBody>
+      </p:sp>
+      <p:sp>
+        <p:nvSpPr>
+          <p:cNvPr id="4" name="Slide Number Placeholder 3">
+            <a:extLst>
+              <a:ext uri="{FF2B5EF4-FFF2-40B4-BE49-F238E27FC236}">
+                <a16:creationId xmlns:a16="http://schemas.microsoft.com/office/drawing/2014/main" id="{C164E8C2-6E51-14D0-AA9B-4EFFC09DA818}"/>
+              </a:ext>
+            </a:extLst>
+          </p:cNvPr>
+          <p:cNvSpPr>
+            <a:spLocks noGrp="1"/>
+          </p:cNvSpPr>
+          <p:nvPr>
+            <p:ph type="sldNum" sz="quarter" idx="12"/>
+          </p:nvPr>
+        </p:nvSpPr>
+        <p:spPr/>
+        <p:txBody>
+          <a:bodyPr/>
+          <a:lstStyle/>
+          <a:p>
+            <a:fld id="{CC057153-B650-4DEB-B370-79DDCFDCE934}" type="slidenum">
+              <a:rPr lang="en-US" smtClean="0"/>
+              <a:t>20</a:t>
+            </a:fld>
+            <a:endParaRPr lang="en-US"/>
+          </a:p>
+        </p:txBody>
+      </p:sp>
+    </p:spTree>
+    <p:extLst>
+      <p:ext uri="{BB962C8B-B14F-4D97-AF65-F5344CB8AC3E}">
+        <p14:creationId xmlns:p14="http://schemas.microsoft.com/office/powerpoint/2010/main" val="125997361"/>
+      </p:ext>
+    </p:extLst>
+  </p:cSld>
+  <p:clrMapOvr>
+    <a:masterClrMapping/>
+  </p:clrMapOvr>
+</p:sld>
+</file>
+
+<file path=ppt/slides/slide21.xml><?xml version="1.0" encoding="utf-8"?>
 <p:sld xmlns:a="http://schemas.openxmlformats.org/drawingml/2006/main" xmlns:r="http://schemas.openxmlformats.org/officeDocument/2006/relationships" xmlns:p="http://schemas.openxmlformats.org/presentationml/2006/main">
   <p:cSld>
     <p:spTree>
@@ -8223,7 +8275,9 @@
           </a:xfrm>
         </p:spPr>
         <p:txBody>
-          <a:bodyPr/>
+          <a:bodyPr>
+            <a:normAutofit fontScale="92500" lnSpcReduction="10000"/>
+          </a:bodyPr>
           <a:lstStyle/>
           <a:p>
             <a:r>
@@ -8244,6 +8298,14 @@
             </a:r>
             <a:r>
               <a:rPr lang="fi-FI" dirty="0" err="1"/>
+              <a:t>original</a:t>
+            </a:r>
+            <a:r>
+              <a:rPr lang="fi-FI" dirty="0"/>
+              <a:t> </a:t>
+            </a:r>
+            <a:r>
+              <a:rPr lang="fi-FI" dirty="0" err="1"/>
               <a:t>goals</a:t>
             </a:r>
             <a:r>
@@ -8254,18 +8316,7 @@
               <a:rPr lang="fi-FI" dirty="0" err="1"/>
               <a:t>tasks</a:t>
             </a:r>
-            <a:r>
-              <a:rPr lang="fi-FI" dirty="0"/>
-              <a:t> </a:t>
-            </a:r>
-            <a:r>
-              <a:rPr lang="fi-FI" dirty="0" err="1"/>
-              <a:t>initially</a:t>
-            </a:r>
-            <a:r>
-              <a:rPr lang="fi-FI" dirty="0"/>
-              <a:t> set</a:t>
-            </a:r>
+            <a:endParaRPr lang="fi-FI" dirty="0"/>
           </a:p>
           <a:p>
             <a:r>
@@ -8339,16 +8390,126 @@
             <a:endParaRPr lang="fi-FI" dirty="0"/>
           </a:p>
           <a:p>
+            <a:r>
+              <a:rPr lang="fi-FI" dirty="0"/>
+              <a:t>Works is </a:t>
+            </a:r>
+            <a:r>
+              <a:rPr lang="fi-FI" dirty="0" err="1"/>
+              <a:t>diverse</a:t>
+            </a:r>
+            <a:r>
+              <a:rPr lang="fi-FI" dirty="0"/>
+              <a:t> and </a:t>
+            </a:r>
+            <a:r>
+              <a:rPr lang="fi-FI" dirty="0" err="1"/>
+              <a:t>uses</a:t>
+            </a:r>
+            <a:r>
+              <a:rPr lang="fi-FI" dirty="0"/>
+              <a:t> </a:t>
+            </a:r>
+            <a:r>
+              <a:rPr lang="fi-FI" dirty="0" err="1"/>
+              <a:t>variety</a:t>
+            </a:r>
+            <a:r>
+              <a:rPr lang="fi-FI" dirty="0"/>
+              <a:t> of </a:t>
+            </a:r>
+            <a:r>
+              <a:rPr lang="fi-FI" dirty="0" err="1"/>
+              <a:t>tools</a:t>
+            </a:r>
             <a:endParaRPr lang="fi-FI" dirty="0"/>
           </a:p>
           <a:p>
             <a:r>
-              <a:rPr lang="fi-FI"/>
-              <a:t>Learning</a:t>
-            </a:r>
-            <a:r>
-              <a:rPr lang="fi-FI" dirty="0"/>
-              <a:t>:</a:t>
+              <a:rPr lang="fi-FI" dirty="0" err="1"/>
+              <a:t>Final</a:t>
+            </a:r>
+            <a:r>
+              <a:rPr lang="fi-FI" dirty="0"/>
+              <a:t> </a:t>
+            </a:r>
+            <a:r>
+              <a:rPr lang="fi-FI" dirty="0" err="1"/>
+              <a:t>work</a:t>
+            </a:r>
+            <a:r>
+              <a:rPr lang="fi-FI" dirty="0"/>
+              <a:t> </a:t>
+            </a:r>
+            <a:r>
+              <a:rPr lang="fi-FI" dirty="0" err="1"/>
+              <a:t>provides</a:t>
+            </a:r>
+            <a:r>
+              <a:rPr lang="fi-FI" dirty="0"/>
+              <a:t> a </a:t>
+            </a:r>
+            <a:r>
+              <a:rPr lang="fi-FI" dirty="0" err="1"/>
+              <a:t>lot</a:t>
+            </a:r>
+            <a:r>
+              <a:rPr lang="fi-FI" dirty="0"/>
+              <a:t> of </a:t>
+            </a:r>
+            <a:r>
+              <a:rPr lang="fi-FI" dirty="0" err="1"/>
+              <a:t>visuals</a:t>
+            </a:r>
+            <a:r>
+              <a:rPr lang="fi-FI" dirty="0"/>
+              <a:t> and </a:t>
+            </a:r>
+            <a:r>
+              <a:rPr lang="fi-FI" dirty="0" err="1"/>
+              <a:t>provide</a:t>
+            </a:r>
+            <a:r>
+              <a:rPr lang="fi-FI" dirty="0"/>
+              <a:t> </a:t>
+            </a:r>
+            <a:r>
+              <a:rPr lang="fi-FI" dirty="0" err="1"/>
+              <a:t>deep</a:t>
+            </a:r>
+            <a:r>
+              <a:rPr lang="fi-FI" dirty="0"/>
+              <a:t> </a:t>
+            </a:r>
+            <a:r>
+              <a:rPr lang="fi-FI" dirty="0" err="1"/>
+              <a:t>insights</a:t>
+            </a:r>
+            <a:r>
+              <a:rPr lang="fi-FI" dirty="0"/>
+              <a:t> to </a:t>
+            </a:r>
+            <a:r>
+              <a:rPr lang="fi-FI" dirty="0" err="1"/>
+              <a:t>the</a:t>
+            </a:r>
+            <a:r>
+              <a:rPr lang="fi-FI" dirty="0"/>
+              <a:t> data and </a:t>
+            </a:r>
+            <a:r>
+              <a:rPr lang="fi-FI" dirty="0" err="1"/>
+              <a:t>trends</a:t>
+            </a:r>
+            <a:endParaRPr lang="fi-FI" dirty="0"/>
+          </a:p>
+          <a:p>
+            <a:endParaRPr lang="fi-FI" dirty="0"/>
+          </a:p>
+          <a:p>
+            <a:r>
+              <a:rPr lang="fi-FI" dirty="0"/>
+              <a:t>Learning:</a:t>
             </a:r>
           </a:p>
           <a:p>
@@ -8358,8 +8519,29 @@
             </a:pPr>
             <a:r>
               <a:rPr lang="fi-FI" dirty="0"/>
-              <a:t>SQL</a:t>
-            </a:r>
+              <a:t>SQL </a:t>
+            </a:r>
+            <a:r>
+              <a:rPr lang="fi-FI" dirty="0" err="1"/>
+              <a:t>database</a:t>
+            </a:r>
+            <a:r>
+              <a:rPr lang="fi-FI" dirty="0"/>
+              <a:t> </a:t>
+            </a:r>
+            <a:r>
+              <a:rPr lang="fi-FI" dirty="0" err="1"/>
+              <a:t>creation</a:t>
+            </a:r>
+            <a:r>
+              <a:rPr lang="fi-FI" dirty="0"/>
+              <a:t> and </a:t>
+            </a:r>
+            <a:r>
+              <a:rPr lang="fi-FI" dirty="0" err="1"/>
+              <a:t>querying</a:t>
+            </a:r>
+            <a:endParaRPr lang="fi-FI" dirty="0"/>
           </a:p>
           <a:p>
             <a:pPr marL="571500" lvl="1" indent="-342900">
@@ -8412,7 +8594,7 @@
             </a:r>
             <a:r>
               <a:rPr lang="fi-FI" dirty="0"/>
-              <a:t> data</a:t>
+              <a:t> dataset</a:t>
             </a:r>
           </a:p>
           <a:p>
@@ -8447,6 +8629,49 @@
             <a:r>
               <a:rPr lang="fi-FI" dirty="0" err="1"/>
               <a:t>results</a:t>
+            </a:r>
+            <a:endParaRPr lang="fi-FI" dirty="0"/>
+          </a:p>
+          <a:p>
+            <a:pPr marL="571500" lvl="1" indent="-342900">
+              <a:buFont typeface="+mj-lt"/>
+              <a:buAutoNum type="arabicPeriod"/>
+            </a:pPr>
+            <a:r>
+              <a:rPr lang="fi-FI" dirty="0"/>
+              <a:t>Interactive </a:t>
+            </a:r>
+            <a:r>
+              <a:rPr lang="fi-FI" dirty="0" err="1"/>
+              <a:t>visualisation</a:t>
+            </a:r>
+            <a:r>
+              <a:rPr lang="fi-FI"/>
+              <a:t> data </a:t>
+            </a:r>
+            <a:r>
+              <a:rPr lang="fi-FI" dirty="0"/>
+              <a:t>to </a:t>
+            </a:r>
+            <a:r>
+              <a:rPr lang="fi-FI" dirty="0" err="1"/>
+              <a:t>see</a:t>
+            </a:r>
+            <a:r>
+              <a:rPr lang="fi-FI" dirty="0"/>
+              <a:t> </a:t>
+            </a:r>
+            <a:r>
+              <a:rPr lang="fi-FI" dirty="0" err="1"/>
+              <a:t>customised</a:t>
+            </a:r>
+            <a:r>
+              <a:rPr lang="fi-FI" dirty="0"/>
+              <a:t> </a:t>
+            </a:r>
+            <a:r>
+              <a:rPr lang="fi-FI" dirty="0" err="1"/>
+              <a:t>insights</a:t>
             </a:r>
             <a:endParaRPr lang="fi-FI" dirty="0"/>
           </a:p>
@@ -8458,6 +8683,68 @@
             <a:endParaRPr lang="fi-FI" dirty="0"/>
           </a:p>
           <a:p>
+            <a:r>
+              <a:rPr lang="fi-FI" dirty="0" err="1"/>
+              <a:t>Improvements</a:t>
+            </a:r>
+            <a:r>
+              <a:rPr lang="fi-FI" dirty="0"/>
+              <a:t> </a:t>
+            </a:r>
+            <a:r>
+              <a:rPr lang="fi-FI" dirty="0" err="1"/>
+              <a:t>can</a:t>
+            </a:r>
+            <a:r>
+              <a:rPr lang="fi-FI" dirty="0"/>
+              <a:t> </a:t>
+            </a:r>
+            <a:r>
+              <a:rPr lang="fi-FI" dirty="0" err="1"/>
+              <a:t>be</a:t>
+            </a:r>
+            <a:r>
+              <a:rPr lang="fi-FI" dirty="0"/>
+              <a:t> made to ML for </a:t>
+            </a:r>
+            <a:r>
+              <a:rPr lang="fi-FI" dirty="0" err="1"/>
+              <a:t>getting</a:t>
+            </a:r>
+            <a:r>
+              <a:rPr lang="fi-FI" dirty="0"/>
+              <a:t> </a:t>
+            </a:r>
+            <a:r>
+              <a:rPr lang="fi-FI" dirty="0" err="1"/>
+              <a:t>better</a:t>
+            </a:r>
+            <a:r>
+              <a:rPr lang="fi-FI" dirty="0"/>
+              <a:t> </a:t>
+            </a:r>
+            <a:r>
+              <a:rPr lang="fi-FI" dirty="0" err="1"/>
+              <a:t>model</a:t>
+            </a:r>
+            <a:r>
+              <a:rPr lang="fi-FI" dirty="0"/>
+              <a:t> </a:t>
+            </a:r>
+            <a:r>
+              <a:rPr lang="fi-FI" dirty="0" err="1"/>
+              <a:t>results</a:t>
+            </a:r>
+            <a:endParaRPr lang="fi-FI" dirty="0"/>
+          </a:p>
+          <a:p>
+            <a:pPr marL="571500" lvl="1" indent="-342900">
+              <a:buFont typeface="+mj-lt"/>
+              <a:buAutoNum type="arabicPeriod"/>
+            </a:pPr>
+            <a:endParaRPr lang="fi-FI" dirty="0"/>
+          </a:p>
+          <a:p>
             <a:pPr lvl="1"/>
             <a:endParaRPr lang="fi-FI" dirty="0"/>
           </a:p>
@@ -8489,7 +8776,7 @@
           <a:p>
             <a:fld id="{CC057153-B650-4DEB-B370-79DDCFDCE934}" type="slidenum">
               <a:rPr lang="en-US" smtClean="0"/>
-              <a:t>20</a:t>
+              <a:t>21</a:t>
             </a:fld>
             <a:endParaRPr lang="en-US"/>
           </a:p>
@@ -8513,7 +8800,13 @@
   <p:cSld>
     <p:spTree>
       <p:nvGrpSpPr>
-        <p:cNvPr id="1" name=""/>
+        <p:cNvPr id="1" name="">
+          <a:extLst>
+            <a:ext uri="{FF2B5EF4-FFF2-40B4-BE49-F238E27FC236}">
+              <a16:creationId xmlns:a16="http://schemas.microsoft.com/office/drawing/2014/main" id="{A14951DA-B861-3473-A3B3-B2EF230B533A}"/>
+            </a:ext>
+          </a:extLst>
+        </p:cNvPr>
         <p:cNvGrpSpPr/>
         <p:nvPr/>
       </p:nvGrpSpPr>
@@ -8530,7 +8823,7 @@
           <p:cNvPr id="2" name="Title 1">
             <a:extLst>
               <a:ext uri="{FF2B5EF4-FFF2-40B4-BE49-F238E27FC236}">
-                <a16:creationId xmlns:a16="http://schemas.microsoft.com/office/drawing/2014/main" id="{BB743E11-4EBC-0408-B526-C044F38B2F56}"/>
+                <a16:creationId xmlns:a16="http://schemas.microsoft.com/office/drawing/2014/main" id="{52CA117A-4D67-98D0-3BF1-FBB9323A7DAC}"/>
               </a:ext>
             </a:extLst>
           </p:cNvPr>
@@ -8541,24 +8834,32 @@
             <p:ph type="title"/>
           </p:nvPr>
         </p:nvSpPr>
-        <p:spPr/>
+        <p:spPr>
+          <a:xfrm>
+            <a:off x="471678" y="582930"/>
+            <a:ext cx="3930777" cy="1132258"/>
+          </a:xfrm>
+        </p:spPr>
         <p:txBody>
           <a:bodyPr/>
           <a:lstStyle/>
           <a:p>
             <a:r>
               <a:rPr lang="fi-FI" dirty="0" err="1"/>
-              <a:t>Skills</a:t>
-            </a:r>
-            <a:r>
-              <a:rPr lang="fi-FI" dirty="0"/>
-              <a:t> </a:t>
-            </a:r>
-            <a:r>
-              <a:rPr lang="fi-FI" dirty="0" err="1"/>
-              <a:t>utilised</a:t>
-            </a:r>
-            <a:endParaRPr lang="fi-FI" dirty="0"/>
+              <a:t>About</a:t>
+            </a:r>
+            <a:r>
+              <a:rPr lang="fi-FI" dirty="0"/>
+              <a:t> </a:t>
+            </a:r>
+            <a:r>
+              <a:rPr lang="fi-FI" dirty="0" err="1"/>
+              <a:t>the</a:t>
+            </a:r>
+            <a:r>
+              <a:rPr lang="fi-FI" dirty="0"/>
+              <a:t> data</a:t>
+            </a:r>
           </a:p>
         </p:txBody>
       </p:sp>
@@ -8567,7 +8868,7 @@
           <p:cNvPr id="3" name="Content Placeholder 2">
             <a:extLst>
               <a:ext uri="{FF2B5EF4-FFF2-40B4-BE49-F238E27FC236}">
-                <a16:creationId xmlns:a16="http://schemas.microsoft.com/office/drawing/2014/main" id="{88E1ECA5-3BD7-6B7E-8E22-7E59E4AB121A}"/>
+                <a16:creationId xmlns:a16="http://schemas.microsoft.com/office/drawing/2014/main" id="{A1B672ED-3471-283B-E96C-2474026D6FB8}"/>
               </a:ext>
             </a:extLst>
           </p:cNvPr>
@@ -8578,60 +8879,128 @@
             <p:ph idx="1"/>
           </p:nvPr>
         </p:nvSpPr>
-        <p:spPr/>
+        <p:spPr>
+          <a:xfrm>
+            <a:off x="507872" y="1715532"/>
+            <a:ext cx="10653579" cy="4593828"/>
+          </a:xfrm>
+        </p:spPr>
         <p:txBody>
           <a:bodyPr/>
           <a:lstStyle/>
           <a:p>
             <a:r>
               <a:rPr lang="fi-FI" dirty="0"/>
-              <a:t>Data Processing:</a:t>
-            </a:r>
-          </a:p>
-          <a:p>
-            <a:pPr lvl="1">
-              <a:buFont typeface="Courier New" panose="02070309020205020404" pitchFamily="49" charset="0"/>
-              <a:buChar char="o"/>
-            </a:pPr>
-            <a:r>
-              <a:rPr lang="fi-FI" dirty="0"/>
-              <a:t> </a:t>
-            </a:r>
-            <a:r>
-              <a:rPr lang="fi-FI" dirty="0" err="1"/>
-              <a:t>Attain</a:t>
-            </a:r>
-            <a:r>
-              <a:rPr lang="fi-FI" dirty="0"/>
-              <a:t> </a:t>
-            </a:r>
-            <a:r>
-              <a:rPr lang="fi-FI" dirty="0" err="1"/>
-              <a:t>clean</a:t>
-            </a:r>
-            <a:r>
-              <a:rPr lang="fi-FI" dirty="0"/>
-              <a:t> </a:t>
-            </a:r>
-            <a:r>
-              <a:rPr lang="fi-FI" dirty="0" err="1"/>
-              <a:t>usable</a:t>
-            </a:r>
-            <a:r>
-              <a:rPr lang="fi-FI" dirty="0"/>
-              <a:t> data, </a:t>
-            </a:r>
-            <a:r>
-              <a:rPr lang="fi-FI" dirty="0" err="1"/>
-              <a:t>get</a:t>
-            </a:r>
-            <a:r>
-              <a:rPr lang="fi-FI" dirty="0"/>
-              <a:t> </a:t>
-            </a:r>
-            <a:r>
-              <a:rPr lang="fi-FI" dirty="0" err="1"/>
-              <a:t>visualisations</a:t>
+              <a:t>Dataset </a:t>
+            </a:r>
+            <a:r>
+              <a:rPr lang="fi-FI" dirty="0" err="1"/>
+              <a:t>obtained</a:t>
+            </a:r>
+            <a:r>
+              <a:rPr lang="fi-FI" dirty="0"/>
+              <a:t> </a:t>
+            </a:r>
+            <a:r>
+              <a:rPr lang="fi-FI" dirty="0" err="1"/>
+              <a:t>from</a:t>
+            </a:r>
+            <a:r>
+              <a:rPr lang="fi-FI" dirty="0"/>
+              <a:t> </a:t>
+            </a:r>
+            <a:r>
+              <a:rPr lang="fi-FI" dirty="0" err="1"/>
+              <a:t>Kaggle</a:t>
+            </a:r>
+            <a:r>
+              <a:rPr lang="fi-FI" dirty="0"/>
+              <a:t>,</a:t>
+            </a:r>
+            <a:br>
+              <a:rPr lang="fi-FI" dirty="0"/>
+            </a:br>
+            <a:r>
+              <a:rPr lang="fi-FI" dirty="0" err="1"/>
+              <a:t>contains</a:t>
+            </a:r>
+            <a:r>
+              <a:rPr lang="fi-FI" dirty="0"/>
+              <a:t> </a:t>
+            </a:r>
+            <a:r>
+              <a:rPr lang="fi-FI" dirty="0" err="1"/>
+              <a:t>customer</a:t>
+            </a:r>
+            <a:br>
+              <a:rPr lang="fi-FI" dirty="0"/>
+            </a:br>
+            <a:r>
+              <a:rPr lang="fi-FI" dirty="0" err="1"/>
+              <a:t>segmentation</a:t>
+            </a:r>
+            <a:r>
+              <a:rPr lang="fi-FI" dirty="0"/>
+              <a:t> </a:t>
+            </a:r>
+            <a:r>
+              <a:rPr lang="fi-FI" dirty="0" err="1"/>
+              <a:t>details</a:t>
+            </a:r>
+            <a:endParaRPr lang="fi-FI" dirty="0"/>
+          </a:p>
+          <a:p>
+            <a:r>
+              <a:rPr lang="fi-FI" dirty="0"/>
+              <a:t>~542k </a:t>
+            </a:r>
+            <a:r>
+              <a:rPr lang="fi-FI" dirty="0" err="1"/>
+              <a:t>rows</a:t>
+            </a:r>
+            <a:endParaRPr lang="fi-FI" dirty="0"/>
+          </a:p>
+          <a:p>
+            <a:r>
+              <a:rPr lang="fi-FI" dirty="0" err="1"/>
+              <a:t>Ordering</a:t>
+            </a:r>
+            <a:r>
+              <a:rPr lang="fi-FI" dirty="0"/>
+              <a:t> </a:t>
+            </a:r>
+            <a:r>
+              <a:rPr lang="fi-FI" dirty="0" err="1"/>
+              <a:t>countries</a:t>
+            </a:r>
+            <a:r>
+              <a:rPr lang="fi-FI" dirty="0"/>
+              <a:t> </a:t>
+            </a:r>
+            <a:r>
+              <a:rPr lang="fi-FI" dirty="0" err="1"/>
+              <a:t>mainly</a:t>
+            </a:r>
+            <a:r>
+              <a:rPr lang="fi-FI" dirty="0"/>
+              <a:t> in</a:t>
+            </a:r>
+            <a:br>
+              <a:rPr lang="fi-FI" dirty="0"/>
+            </a:br>
+            <a:r>
+              <a:rPr lang="fi-FI" dirty="0"/>
+              <a:t>Europe/UK</a:t>
+            </a:r>
+          </a:p>
+          <a:p>
+            <a:r>
+              <a:rPr lang="fi-FI" dirty="0"/>
+              <a:t>4367 </a:t>
+            </a:r>
+            <a:r>
+              <a:rPr lang="fi-FI" dirty="0" err="1"/>
+              <a:t>customers</a:t>
             </a:r>
             <a:r>
               <a:rPr lang="fi-FI" dirty="0"/>
@@ -8639,335 +9008,42 @@
             </a:r>
             <a:r>
               <a:rPr lang="fi-FI" dirty="0" err="1"/>
-              <a:t>perform</a:t>
-            </a:r>
-            <a:r>
-              <a:rPr lang="fi-FI" dirty="0"/>
-              <a:t> </a:t>
-            </a:r>
-            <a:r>
-              <a:rPr lang="fi-FI" dirty="0" err="1"/>
-              <a:t>machine</a:t>
-            </a:r>
-            <a:r>
-              <a:rPr lang="fi-FI" dirty="0"/>
-              <a:t> </a:t>
-            </a:r>
-            <a:r>
-              <a:rPr lang="fi-FI" dirty="0" err="1"/>
-              <a:t>learning</a:t>
-            </a:r>
-            <a:r>
-              <a:rPr lang="fi-FI" dirty="0"/>
-              <a:t> </a:t>
-            </a:r>
-            <a:r>
-              <a:rPr lang="fi-FI" dirty="0" err="1"/>
-              <a:t>analysis</a:t>
+              <a:t>later</a:t>
+            </a:r>
+            <a:r>
+              <a:rPr lang="fi-FI" dirty="0"/>
+              <a:t> </a:t>
+            </a:r>
+            <a:r>
+              <a:rPr lang="fi-FI" dirty="0" err="1"/>
+              <a:t>cleaned</a:t>
             </a:r>
             <a:r>
               <a:rPr lang="fi-FI" dirty="0"/>
               <a:t> and </a:t>
             </a:r>
-            <a:br>
-              <a:rPr lang="fi-FI" dirty="0"/>
-            </a:br>
-            <a:r>
-              <a:rPr lang="fi-FI" dirty="0" err="1"/>
-              <a:t>develop</a:t>
-            </a:r>
-            <a:r>
-              <a:rPr lang="fi-FI" dirty="0"/>
-              <a:t> </a:t>
-            </a:r>
-            <a:r>
-              <a:rPr lang="fi-FI" dirty="0" err="1"/>
-              <a:t>dashboards</a:t>
-            </a:r>
-            <a:r>
-              <a:rPr lang="fi-FI" dirty="0"/>
-              <a:t>, to </a:t>
-            </a:r>
-            <a:r>
-              <a:rPr lang="fi-FI" dirty="0" err="1"/>
-              <a:t>visualise</a:t>
-            </a:r>
-            <a:r>
-              <a:rPr lang="fi-FI" dirty="0"/>
-              <a:t> </a:t>
-            </a:r>
-            <a:r>
-              <a:rPr lang="fi-FI" dirty="0" err="1"/>
-              <a:t>the</a:t>
-            </a:r>
-            <a:r>
-              <a:rPr lang="fi-FI" dirty="0"/>
-              <a:t> data, </a:t>
-            </a:r>
-            <a:r>
-              <a:rPr lang="fi-FI" dirty="0" err="1"/>
-              <a:t>increase</a:t>
-            </a:r>
-            <a:r>
-              <a:rPr lang="fi-FI" dirty="0"/>
-              <a:t> </a:t>
-            </a:r>
-            <a:r>
-              <a:rPr lang="fi-FI" dirty="0" err="1"/>
-              <a:t>sales</a:t>
-            </a:r>
-            <a:r>
-              <a:rPr lang="fi-FI" dirty="0"/>
-              <a:t>, </a:t>
-            </a:r>
-            <a:r>
-              <a:rPr lang="fi-FI" dirty="0" err="1"/>
-              <a:t>retain</a:t>
-            </a:r>
-            <a:r>
-              <a:rPr lang="fi-FI" dirty="0"/>
-              <a:t> </a:t>
-            </a:r>
-            <a:r>
-              <a:rPr lang="fi-FI" dirty="0" err="1"/>
-              <a:t>customers</a:t>
-            </a:r>
-            <a:r>
-              <a:rPr lang="fi-FI" dirty="0"/>
-              <a:t>.</a:t>
-            </a:r>
-          </a:p>
-          <a:p>
+            <a:r>
+              <a:rPr lang="fi-FI" dirty="0" err="1"/>
+              <a:t>reduced</a:t>
+            </a:r>
+            <a:r>
+              <a:rPr lang="fi-FI" dirty="0"/>
+              <a:t> to 4315 for </a:t>
+            </a:r>
+            <a:r>
+              <a:rPr lang="fi-FI" dirty="0" err="1"/>
+              <a:t>improved</a:t>
+            </a:r>
+            <a:r>
+              <a:rPr lang="fi-FI" dirty="0"/>
+              <a:t> feature </a:t>
+            </a:r>
+            <a:r>
+              <a:rPr lang="fi-FI" dirty="0" err="1"/>
+              <a:t>extraction</a:t>
+            </a:r>
             <a:endParaRPr lang="fi-FI" dirty="0"/>
           </a:p>
-          <a:p>
-            <a:r>
-              <a:rPr lang="fi-FI" dirty="0"/>
-              <a:t>ML</a:t>
-            </a:r>
-          </a:p>
-          <a:p>
-            <a:pPr lvl="1">
-              <a:buFont typeface="Courier New" panose="02070309020205020404" pitchFamily="49" charset="0"/>
-              <a:buChar char="o"/>
-            </a:pPr>
-            <a:r>
-              <a:rPr lang="fi-FI" dirty="0" err="1"/>
-              <a:t>Ethics</a:t>
-            </a:r>
-            <a:r>
-              <a:rPr lang="fi-FI" dirty="0"/>
-              <a:t> of </a:t>
-            </a:r>
-            <a:r>
-              <a:rPr lang="fi-FI" dirty="0" err="1"/>
-              <a:t>using</a:t>
-            </a:r>
-            <a:r>
-              <a:rPr lang="fi-FI" dirty="0"/>
-              <a:t> AI for </a:t>
-            </a:r>
-            <a:r>
-              <a:rPr lang="fi-FI" dirty="0" err="1"/>
-              <a:t>during</a:t>
-            </a:r>
-            <a:r>
-              <a:rPr lang="fi-FI" dirty="0"/>
-              <a:t> </a:t>
-            </a:r>
-            <a:r>
-              <a:rPr lang="fi-FI" dirty="0" err="1"/>
-              <a:t>the</a:t>
-            </a:r>
-            <a:r>
-              <a:rPr lang="fi-FI" dirty="0"/>
-              <a:t> </a:t>
-            </a:r>
-            <a:r>
-              <a:rPr lang="fi-FI" dirty="0" err="1"/>
-              <a:t>process</a:t>
-            </a:r>
-            <a:r>
-              <a:rPr lang="fi-FI" dirty="0"/>
-              <a:t>, data </a:t>
-            </a:r>
-            <a:r>
-              <a:rPr lang="fi-FI" dirty="0" err="1"/>
-              <a:t>safety</a:t>
-            </a:r>
-            <a:r>
-              <a:rPr lang="fi-FI" dirty="0"/>
-              <a:t>/</a:t>
-            </a:r>
-            <a:r>
-              <a:rPr lang="fi-FI" dirty="0" err="1"/>
-              <a:t>security</a:t>
-            </a:r>
-            <a:r>
-              <a:rPr lang="fi-FI" dirty="0"/>
-              <a:t> and </a:t>
-            </a:r>
-            <a:r>
-              <a:rPr lang="fi-FI" dirty="0" err="1"/>
-              <a:t>privacy</a:t>
-            </a:r>
-            <a:endParaRPr lang="fi-FI" dirty="0"/>
-          </a:p>
-          <a:p>
-            <a:pPr lvl="1">
-              <a:buFont typeface="Courier New" panose="02070309020205020404" pitchFamily="49" charset="0"/>
-              <a:buChar char="o"/>
-            </a:pPr>
-            <a:r>
-              <a:rPr lang="fi-FI" dirty="0"/>
-              <a:t>If data is </a:t>
-            </a:r>
-            <a:r>
-              <a:rPr lang="fi-FI" dirty="0" err="1"/>
-              <a:t>confidential</a:t>
-            </a:r>
-            <a:r>
-              <a:rPr lang="fi-FI" dirty="0"/>
-              <a:t>, </a:t>
-            </a:r>
-            <a:r>
-              <a:rPr lang="fi-FI" dirty="0" err="1"/>
-              <a:t>care</a:t>
-            </a:r>
-            <a:r>
-              <a:rPr lang="fi-FI" dirty="0"/>
-              <a:t> </a:t>
-            </a:r>
-            <a:r>
-              <a:rPr lang="fi-FI" dirty="0" err="1"/>
-              <a:t>should</a:t>
-            </a:r>
-            <a:r>
-              <a:rPr lang="fi-FI" dirty="0"/>
-              <a:t> </a:t>
-            </a:r>
-            <a:r>
-              <a:rPr lang="fi-FI" dirty="0" err="1"/>
-              <a:t>be</a:t>
-            </a:r>
-            <a:r>
-              <a:rPr lang="fi-FI" dirty="0"/>
-              <a:t> </a:t>
-            </a:r>
-            <a:r>
-              <a:rPr lang="fi-FI" dirty="0" err="1"/>
-              <a:t>taken</a:t>
-            </a:r>
-            <a:r>
-              <a:rPr lang="fi-FI" dirty="0"/>
-              <a:t> </a:t>
-            </a:r>
-            <a:r>
-              <a:rPr lang="fi-FI" dirty="0" err="1"/>
-              <a:t>while</a:t>
-            </a:r>
-            <a:r>
-              <a:rPr lang="fi-FI" dirty="0"/>
-              <a:t> </a:t>
-            </a:r>
-            <a:r>
-              <a:rPr lang="fi-FI" dirty="0" err="1"/>
-              <a:t>taking</a:t>
-            </a:r>
-            <a:r>
-              <a:rPr lang="fi-FI" dirty="0"/>
-              <a:t> </a:t>
-            </a:r>
-            <a:r>
-              <a:rPr lang="fi-FI" dirty="0" err="1"/>
-              <a:t>assistance</a:t>
-            </a:r>
-            <a:r>
-              <a:rPr lang="fi-FI" dirty="0"/>
-              <a:t> </a:t>
-            </a:r>
-            <a:r>
-              <a:rPr lang="fi-FI" dirty="0" err="1"/>
-              <a:t>from</a:t>
-            </a:r>
-            <a:r>
-              <a:rPr lang="fi-FI" dirty="0"/>
-              <a:t> AI </a:t>
-            </a:r>
-            <a:r>
-              <a:rPr lang="fi-FI" dirty="0" err="1"/>
-              <a:t>chatbots</a:t>
-            </a:r>
-            <a:r>
-              <a:rPr lang="fi-FI" dirty="0"/>
-              <a:t> (Claude, </a:t>
-            </a:r>
-            <a:r>
-              <a:rPr lang="fi-FI" dirty="0" err="1"/>
-              <a:t>ChatGPT</a:t>
-            </a:r>
-            <a:r>
-              <a:rPr lang="fi-FI" dirty="0"/>
-              <a:t>)</a:t>
-            </a:r>
-          </a:p>
-          <a:p>
-            <a:r>
-              <a:rPr lang="fi-FI" dirty="0"/>
-              <a:t>ML </a:t>
-            </a:r>
-            <a:r>
-              <a:rPr lang="fi-FI" dirty="0" err="1"/>
-              <a:t>Models</a:t>
-            </a:r>
-            <a:endParaRPr lang="fi-FI" dirty="0"/>
-          </a:p>
-          <a:p>
-            <a:pPr lvl="2">
-              <a:buFont typeface="Courier New" panose="02070309020205020404" pitchFamily="49" charset="0"/>
-              <a:buChar char="o"/>
-            </a:pPr>
-            <a:r>
-              <a:rPr lang="fi-FI" dirty="0" err="1"/>
-              <a:t>Logistic</a:t>
-            </a:r>
-            <a:r>
-              <a:rPr lang="fi-FI" dirty="0"/>
-              <a:t> Regression, </a:t>
-            </a:r>
-            <a:r>
-              <a:rPr lang="fi-FI" dirty="0" err="1"/>
-              <a:t>Decision</a:t>
-            </a:r>
-            <a:r>
-              <a:rPr lang="fi-FI" dirty="0"/>
-              <a:t> </a:t>
-            </a:r>
-            <a:r>
-              <a:rPr lang="fi-FI" dirty="0" err="1"/>
-              <a:t>Trees</a:t>
-            </a:r>
-            <a:r>
-              <a:rPr lang="fi-FI" dirty="0"/>
-              <a:t>, Random </a:t>
-            </a:r>
-            <a:r>
-              <a:rPr lang="fi-FI" dirty="0" err="1"/>
-              <a:t>Forest</a:t>
-            </a:r>
-            <a:r>
-              <a:rPr lang="fi-FI" dirty="0"/>
-              <a:t>, K-</a:t>
-            </a:r>
-            <a:r>
-              <a:rPr lang="fi-FI" dirty="0" err="1"/>
-              <a:t>Means</a:t>
-            </a:r>
-            <a:r>
-              <a:rPr lang="fi-FI" dirty="0"/>
-              <a:t> Clustering</a:t>
-            </a:r>
-          </a:p>
         </p:txBody>
       </p:sp>
       <p:sp>
@@ -8975,7 +9051,7 @@
           <p:cNvPr id="4" name="Slide Number Placeholder 3">
             <a:extLst>
               <a:ext uri="{FF2B5EF4-FFF2-40B4-BE49-F238E27FC236}">
-                <a16:creationId xmlns:a16="http://schemas.microsoft.com/office/drawing/2014/main" id="{5E9B64A5-E4A6-2BFF-CE06-B05D2956E854}"/>
+                <a16:creationId xmlns:a16="http://schemas.microsoft.com/office/drawing/2014/main" id="{0EB3DE2A-56F6-0246-C45D-4A1944FA1C13}"/>
               </a:ext>
             </a:extLst>
           </p:cNvPr>
@@ -8999,10 +9075,46 @@
           </a:p>
         </p:txBody>
       </p:sp>
+      <p:pic>
+        <p:nvPicPr>
+          <p:cNvPr id="10" name="Picture 9">
+            <a:extLst>
+              <a:ext uri="{FF2B5EF4-FFF2-40B4-BE49-F238E27FC236}">
+                <a16:creationId xmlns:a16="http://schemas.microsoft.com/office/drawing/2014/main" id="{65DED3DC-38E8-1DF9-94DA-993D5F1F59BC}"/>
+              </a:ext>
+            </a:extLst>
+          </p:cNvPr>
+          <p:cNvPicPr>
+            <a:picLocks noChangeAspect="1"/>
+          </p:cNvPicPr>
+          <p:nvPr/>
+        </p:nvPicPr>
+        <p:blipFill>
+          <a:blip r:embed="rId2">
+            <a:extLst>
+              <a:ext uri="{28A0092B-C50C-407E-A947-70E740481C1C}">
+                <a14:useLocalDpi xmlns:a14="http://schemas.microsoft.com/office/drawing/2010/main" val="0"/>
+              </a:ext>
+            </a:extLst>
+          </a:blip>
+          <a:stretch>
+            <a:fillRect/>
+          </a:stretch>
+        </p:blipFill>
+        <p:spPr>
+          <a:xfrm>
+            <a:off x="4490712" y="481965"/>
+            <a:ext cx="7460828" cy="4501515"/>
+          </a:xfrm>
+          <a:prstGeom prst="rect">
+            <a:avLst/>
+          </a:prstGeom>
+        </p:spPr>
+      </p:pic>
     </p:spTree>
     <p:extLst>
       <p:ext uri="{BB962C8B-B14F-4D97-AF65-F5344CB8AC3E}">
-        <p14:creationId xmlns:p14="http://schemas.microsoft.com/office/powerpoint/2010/main" val="1576125230"/>
+        <p14:creationId xmlns:p14="http://schemas.microsoft.com/office/powerpoint/2010/main" val="1682933332"/>
       </p:ext>
     </p:extLst>
   </p:cSld>
@@ -9034,6 +9146,506 @@
           <p:cNvPr id="2" name="Title 1">
             <a:extLst>
               <a:ext uri="{FF2B5EF4-FFF2-40B4-BE49-F238E27FC236}">
+                <a16:creationId xmlns:a16="http://schemas.microsoft.com/office/drawing/2014/main" id="{BB743E11-4EBC-0408-B526-C044F38B2F56}"/>
+              </a:ext>
+            </a:extLst>
+          </p:cNvPr>
+          <p:cNvSpPr>
+            <a:spLocks noGrp="1"/>
+          </p:cNvSpPr>
+          <p:nvPr>
+            <p:ph type="title"/>
+          </p:nvPr>
+        </p:nvSpPr>
+        <p:spPr/>
+        <p:txBody>
+          <a:bodyPr/>
+          <a:lstStyle/>
+          <a:p>
+            <a:r>
+              <a:rPr lang="fi-FI" dirty="0" err="1"/>
+              <a:t>Skills</a:t>
+            </a:r>
+            <a:r>
+              <a:rPr lang="fi-FI" dirty="0"/>
+              <a:t> </a:t>
+            </a:r>
+            <a:r>
+              <a:rPr lang="fi-FI" dirty="0" err="1"/>
+              <a:t>utilised</a:t>
+            </a:r>
+            <a:endParaRPr lang="fi-FI" dirty="0"/>
+          </a:p>
+        </p:txBody>
+      </p:sp>
+      <p:sp>
+        <p:nvSpPr>
+          <p:cNvPr id="3" name="Content Placeholder 2">
+            <a:extLst>
+              <a:ext uri="{FF2B5EF4-FFF2-40B4-BE49-F238E27FC236}">
+                <a16:creationId xmlns:a16="http://schemas.microsoft.com/office/drawing/2014/main" id="{88E1ECA5-3BD7-6B7E-8E22-7E59E4AB121A}"/>
+              </a:ext>
+            </a:extLst>
+          </p:cNvPr>
+          <p:cNvSpPr>
+            <a:spLocks noGrp="1"/>
+          </p:cNvSpPr>
+          <p:nvPr>
+            <p:ph idx="1"/>
+          </p:nvPr>
+        </p:nvSpPr>
+        <p:spPr/>
+        <p:txBody>
+          <a:bodyPr/>
+          <a:lstStyle/>
+          <a:p>
+            <a:r>
+              <a:rPr lang="fi-FI" dirty="0"/>
+              <a:t>Data Processing:</a:t>
+            </a:r>
+          </a:p>
+          <a:p>
+            <a:pPr lvl="1">
+              <a:buFont typeface="Courier New" panose="02070309020205020404" pitchFamily="49" charset="0"/>
+              <a:buChar char="o"/>
+            </a:pPr>
+            <a:r>
+              <a:rPr lang="fi-FI" dirty="0" err="1"/>
+              <a:t>Attain</a:t>
+            </a:r>
+            <a:r>
+              <a:rPr lang="fi-FI" dirty="0"/>
+              <a:t> </a:t>
+            </a:r>
+            <a:r>
+              <a:rPr lang="fi-FI" dirty="0" err="1"/>
+              <a:t>clean</a:t>
+            </a:r>
+            <a:r>
+              <a:rPr lang="fi-FI" dirty="0"/>
+              <a:t> </a:t>
+            </a:r>
+            <a:r>
+              <a:rPr lang="fi-FI" dirty="0" err="1"/>
+              <a:t>usable</a:t>
+            </a:r>
+            <a:r>
+              <a:rPr lang="fi-FI" dirty="0"/>
+              <a:t> data, </a:t>
+            </a:r>
+            <a:r>
+              <a:rPr lang="fi-FI" dirty="0" err="1"/>
+              <a:t>get</a:t>
+            </a:r>
+            <a:r>
+              <a:rPr lang="fi-FI" dirty="0"/>
+              <a:t> </a:t>
+            </a:r>
+            <a:r>
+              <a:rPr lang="fi-FI" dirty="0" err="1"/>
+              <a:t>visualisations</a:t>
+            </a:r>
+            <a:r>
+              <a:rPr lang="fi-FI" dirty="0"/>
+              <a:t>, </a:t>
+            </a:r>
+            <a:r>
+              <a:rPr lang="fi-FI" dirty="0" err="1"/>
+              <a:t>perform</a:t>
+            </a:r>
+            <a:r>
+              <a:rPr lang="fi-FI" dirty="0"/>
+              <a:t> </a:t>
+            </a:r>
+            <a:r>
+              <a:rPr lang="fi-FI" dirty="0" err="1"/>
+              <a:t>machine</a:t>
+            </a:r>
+            <a:r>
+              <a:rPr lang="fi-FI" dirty="0"/>
+              <a:t> </a:t>
+            </a:r>
+            <a:r>
+              <a:rPr lang="fi-FI" dirty="0" err="1"/>
+              <a:t>learning</a:t>
+            </a:r>
+            <a:r>
+              <a:rPr lang="fi-FI" dirty="0"/>
+              <a:t> </a:t>
+            </a:r>
+            <a:r>
+              <a:rPr lang="fi-FI" dirty="0" err="1"/>
+              <a:t>analysis</a:t>
+            </a:r>
+            <a:r>
+              <a:rPr lang="fi-FI" dirty="0"/>
+              <a:t> and </a:t>
+            </a:r>
+            <a:br>
+              <a:rPr lang="fi-FI" dirty="0"/>
+            </a:br>
+            <a:r>
+              <a:rPr lang="fi-FI" dirty="0" err="1"/>
+              <a:t>develop</a:t>
+            </a:r>
+            <a:r>
+              <a:rPr lang="fi-FI" dirty="0"/>
+              <a:t> </a:t>
+            </a:r>
+            <a:r>
+              <a:rPr lang="fi-FI" dirty="0" err="1"/>
+              <a:t>dashboards</a:t>
+            </a:r>
+            <a:r>
+              <a:rPr lang="fi-FI" dirty="0"/>
+              <a:t>, to </a:t>
+            </a:r>
+            <a:r>
+              <a:rPr lang="fi-FI" dirty="0" err="1"/>
+              <a:t>visualise</a:t>
+            </a:r>
+            <a:r>
+              <a:rPr lang="fi-FI" dirty="0"/>
+              <a:t> </a:t>
+            </a:r>
+            <a:r>
+              <a:rPr lang="fi-FI" dirty="0" err="1"/>
+              <a:t>the</a:t>
+            </a:r>
+            <a:r>
+              <a:rPr lang="fi-FI" dirty="0"/>
+              <a:t> data, </a:t>
+            </a:r>
+            <a:r>
+              <a:rPr lang="fi-FI" dirty="0" err="1"/>
+              <a:t>increase</a:t>
+            </a:r>
+            <a:r>
+              <a:rPr lang="fi-FI" dirty="0"/>
+              <a:t> </a:t>
+            </a:r>
+            <a:r>
+              <a:rPr lang="fi-FI" dirty="0" err="1"/>
+              <a:t>sales</a:t>
+            </a:r>
+            <a:r>
+              <a:rPr lang="fi-FI" dirty="0"/>
+              <a:t>, </a:t>
+            </a:r>
+            <a:r>
+              <a:rPr lang="fi-FI" dirty="0" err="1"/>
+              <a:t>retain</a:t>
+            </a:r>
+            <a:r>
+              <a:rPr lang="fi-FI" dirty="0"/>
+              <a:t> </a:t>
+            </a:r>
+            <a:r>
+              <a:rPr lang="fi-FI" dirty="0" err="1"/>
+              <a:t>customers</a:t>
+            </a:r>
+            <a:r>
+              <a:rPr lang="fi-FI" dirty="0"/>
+              <a:t>.</a:t>
+            </a:r>
+          </a:p>
+          <a:p>
+            <a:endParaRPr lang="fi-FI" dirty="0"/>
+          </a:p>
+          <a:p>
+            <a:r>
+              <a:rPr lang="fi-FI" dirty="0"/>
+              <a:t>ML</a:t>
+            </a:r>
+          </a:p>
+          <a:p>
+            <a:pPr lvl="1">
+              <a:buFont typeface="Courier New" panose="02070309020205020404" pitchFamily="49" charset="0"/>
+              <a:buChar char="o"/>
+            </a:pPr>
+            <a:r>
+              <a:rPr lang="fi-FI" dirty="0" err="1"/>
+              <a:t>Ethics</a:t>
+            </a:r>
+            <a:r>
+              <a:rPr lang="fi-FI" dirty="0"/>
+              <a:t> of </a:t>
+            </a:r>
+            <a:r>
+              <a:rPr lang="fi-FI" dirty="0" err="1"/>
+              <a:t>using</a:t>
+            </a:r>
+            <a:r>
+              <a:rPr lang="fi-FI" dirty="0"/>
+              <a:t> AI for </a:t>
+            </a:r>
+            <a:r>
+              <a:rPr lang="fi-FI" dirty="0" err="1"/>
+              <a:t>during</a:t>
+            </a:r>
+            <a:r>
+              <a:rPr lang="fi-FI" dirty="0"/>
+              <a:t> </a:t>
+            </a:r>
+            <a:r>
+              <a:rPr lang="fi-FI" dirty="0" err="1"/>
+              <a:t>the</a:t>
+            </a:r>
+            <a:r>
+              <a:rPr lang="fi-FI" dirty="0"/>
+              <a:t> </a:t>
+            </a:r>
+            <a:r>
+              <a:rPr lang="fi-FI" dirty="0" err="1"/>
+              <a:t>process</a:t>
+            </a:r>
+            <a:r>
+              <a:rPr lang="fi-FI" dirty="0"/>
+              <a:t>, data </a:t>
+            </a:r>
+            <a:r>
+              <a:rPr lang="fi-FI" dirty="0" err="1"/>
+              <a:t>safety</a:t>
+            </a:r>
+            <a:r>
+              <a:rPr lang="fi-FI" dirty="0"/>
+              <a:t>/</a:t>
+            </a:r>
+            <a:r>
+              <a:rPr lang="fi-FI" dirty="0" err="1"/>
+              <a:t>security</a:t>
+            </a:r>
+            <a:r>
+              <a:rPr lang="fi-FI" dirty="0"/>
+              <a:t> and </a:t>
+            </a:r>
+            <a:r>
+              <a:rPr lang="fi-FI" dirty="0" err="1"/>
+              <a:t>privacy</a:t>
+            </a:r>
+            <a:endParaRPr lang="fi-FI" dirty="0"/>
+          </a:p>
+          <a:p>
+            <a:pPr lvl="1">
+              <a:buFont typeface="Courier New" panose="02070309020205020404" pitchFamily="49" charset="0"/>
+              <a:buChar char="o"/>
+            </a:pPr>
+            <a:r>
+              <a:rPr lang="fi-FI" dirty="0"/>
+              <a:t>If data is </a:t>
+            </a:r>
+            <a:r>
+              <a:rPr lang="fi-FI" dirty="0" err="1"/>
+              <a:t>confidential</a:t>
+            </a:r>
+            <a:r>
+              <a:rPr lang="fi-FI" dirty="0"/>
+              <a:t>, </a:t>
+            </a:r>
+            <a:r>
+              <a:rPr lang="fi-FI" dirty="0" err="1"/>
+              <a:t>care</a:t>
+            </a:r>
+            <a:r>
+              <a:rPr lang="fi-FI" dirty="0"/>
+              <a:t> </a:t>
+            </a:r>
+            <a:r>
+              <a:rPr lang="fi-FI" dirty="0" err="1"/>
+              <a:t>should</a:t>
+            </a:r>
+            <a:r>
+              <a:rPr lang="fi-FI" dirty="0"/>
+              <a:t> </a:t>
+            </a:r>
+            <a:r>
+              <a:rPr lang="fi-FI" dirty="0" err="1"/>
+              <a:t>be</a:t>
+            </a:r>
+            <a:r>
+              <a:rPr lang="fi-FI" dirty="0"/>
+              <a:t> </a:t>
+            </a:r>
+            <a:r>
+              <a:rPr lang="fi-FI" dirty="0" err="1"/>
+              <a:t>taken</a:t>
+            </a:r>
+            <a:r>
+              <a:rPr lang="fi-FI" dirty="0"/>
+              <a:t> </a:t>
+            </a:r>
+            <a:r>
+              <a:rPr lang="fi-FI" dirty="0" err="1"/>
+              <a:t>while</a:t>
+            </a:r>
+            <a:r>
+              <a:rPr lang="fi-FI" dirty="0"/>
+              <a:t> </a:t>
+            </a:r>
+            <a:r>
+              <a:rPr lang="fi-FI" dirty="0" err="1"/>
+              <a:t>taking</a:t>
+            </a:r>
+            <a:r>
+              <a:rPr lang="fi-FI" dirty="0"/>
+              <a:t> </a:t>
+            </a:r>
+            <a:r>
+              <a:rPr lang="fi-FI" dirty="0" err="1"/>
+              <a:t>assistance</a:t>
+            </a:r>
+            <a:r>
+              <a:rPr lang="fi-FI" dirty="0"/>
+              <a:t> </a:t>
+            </a:r>
+            <a:r>
+              <a:rPr lang="fi-FI" dirty="0" err="1"/>
+              <a:t>from</a:t>
+            </a:r>
+            <a:r>
+              <a:rPr lang="fi-FI" dirty="0"/>
+              <a:t> AI </a:t>
+            </a:r>
+            <a:r>
+              <a:rPr lang="fi-FI" dirty="0" err="1"/>
+              <a:t>chatbots</a:t>
+            </a:r>
+            <a:r>
+              <a:rPr lang="fi-FI" dirty="0"/>
+              <a:t> (Claude, </a:t>
+            </a:r>
+            <a:r>
+              <a:rPr lang="fi-FI" dirty="0" err="1"/>
+              <a:t>ChatGPT</a:t>
+            </a:r>
+            <a:r>
+              <a:rPr lang="fi-FI" dirty="0"/>
+              <a:t>)</a:t>
+            </a:r>
+          </a:p>
+          <a:p>
+            <a:r>
+              <a:rPr lang="fi-FI" dirty="0"/>
+              <a:t>ML </a:t>
+            </a:r>
+            <a:r>
+              <a:rPr lang="fi-FI" dirty="0" err="1"/>
+              <a:t>Models</a:t>
+            </a:r>
+            <a:endParaRPr lang="fi-FI" dirty="0"/>
+          </a:p>
+          <a:p>
+            <a:pPr lvl="2">
+              <a:buFont typeface="Courier New" panose="02070309020205020404" pitchFamily="49" charset="0"/>
+              <a:buChar char="o"/>
+            </a:pPr>
+            <a:r>
+              <a:rPr lang="fi-FI" dirty="0" err="1"/>
+              <a:t>Logistic</a:t>
+            </a:r>
+            <a:r>
+              <a:rPr lang="fi-FI" dirty="0"/>
+              <a:t> Regression, </a:t>
+            </a:r>
+            <a:r>
+              <a:rPr lang="fi-FI" dirty="0" err="1"/>
+              <a:t>Decision</a:t>
+            </a:r>
+            <a:r>
+              <a:rPr lang="fi-FI" dirty="0"/>
+              <a:t> </a:t>
+            </a:r>
+            <a:r>
+              <a:rPr lang="fi-FI" dirty="0" err="1"/>
+              <a:t>Trees</a:t>
+            </a:r>
+            <a:r>
+              <a:rPr lang="fi-FI" dirty="0"/>
+              <a:t>, Random </a:t>
+            </a:r>
+            <a:r>
+              <a:rPr lang="fi-FI" dirty="0" err="1"/>
+              <a:t>Forest</a:t>
+            </a:r>
+            <a:r>
+              <a:rPr lang="fi-FI" dirty="0"/>
+              <a:t>, K-</a:t>
+            </a:r>
+            <a:r>
+              <a:rPr lang="fi-FI" dirty="0" err="1"/>
+              <a:t>Means</a:t>
+            </a:r>
+            <a:r>
+              <a:rPr lang="fi-FI" dirty="0"/>
+              <a:t> Clustering</a:t>
+            </a:r>
+          </a:p>
+        </p:txBody>
+      </p:sp>
+      <p:sp>
+        <p:nvSpPr>
+          <p:cNvPr id="4" name="Slide Number Placeholder 3">
+            <a:extLst>
+              <a:ext uri="{FF2B5EF4-FFF2-40B4-BE49-F238E27FC236}">
+                <a16:creationId xmlns:a16="http://schemas.microsoft.com/office/drawing/2014/main" id="{5E9B64A5-E4A6-2BFF-CE06-B05D2956E854}"/>
+              </a:ext>
+            </a:extLst>
+          </p:cNvPr>
+          <p:cNvSpPr>
+            <a:spLocks noGrp="1"/>
+          </p:cNvSpPr>
+          <p:nvPr>
+            <p:ph type="sldNum" sz="quarter" idx="12"/>
+          </p:nvPr>
+        </p:nvSpPr>
+        <p:spPr/>
+        <p:txBody>
+          <a:bodyPr/>
+          <a:lstStyle/>
+          <a:p>
+            <a:fld id="{CC057153-B650-4DEB-B370-79DDCFDCE934}" type="slidenum">
+              <a:rPr lang="en-US" smtClean="0"/>
+              <a:t>4</a:t>
+            </a:fld>
+            <a:endParaRPr lang="en-US"/>
+          </a:p>
+        </p:txBody>
+      </p:sp>
+    </p:spTree>
+    <p:extLst>
+      <p:ext uri="{BB962C8B-B14F-4D97-AF65-F5344CB8AC3E}">
+        <p14:creationId xmlns:p14="http://schemas.microsoft.com/office/powerpoint/2010/main" val="1576125230"/>
+      </p:ext>
+    </p:extLst>
+  </p:cSld>
+  <p:clrMapOvr>
+    <a:masterClrMapping/>
+  </p:clrMapOvr>
+</p:sld>
+</file>
+
+<file path=ppt/slides/slide5.xml><?xml version="1.0" encoding="utf-8"?>
+<p:sld xmlns:a="http://schemas.openxmlformats.org/drawingml/2006/main" xmlns:r="http://schemas.openxmlformats.org/officeDocument/2006/relationships" xmlns:p="http://schemas.openxmlformats.org/presentationml/2006/main">
+  <p:cSld>
+    <p:spTree>
+      <p:nvGrpSpPr>
+        <p:cNvPr id="1" name=""/>
+        <p:cNvGrpSpPr/>
+        <p:nvPr/>
+      </p:nvGrpSpPr>
+      <p:grpSpPr>
+        <a:xfrm>
+          <a:off x="0" y="0"/>
+          <a:ext cx="0" cy="0"/>
+          <a:chOff x="0" y="0"/>
+          <a:chExt cx="0" cy="0"/>
+        </a:xfrm>
+      </p:grpSpPr>
+      <p:sp>
+        <p:nvSpPr>
+          <p:cNvPr id="2" name="Title 1">
+            <a:extLst>
+              <a:ext uri="{FF2B5EF4-FFF2-40B4-BE49-F238E27FC236}">
                 <a16:creationId xmlns:a16="http://schemas.microsoft.com/office/drawing/2014/main" id="{0B0DA551-138B-F1B5-4EE2-58F36E43BDD1}"/>
               </a:ext>
             </a:extLst>
@@ -9185,7 +9797,7 @@
           <a:p>
             <a:fld id="{CC057153-B650-4DEB-B370-79DDCFDCE934}" type="slidenum">
               <a:rPr lang="en-US" smtClean="0"/>
-              <a:t>4</a:t>
+              <a:t>5</a:t>
             </a:fld>
             <a:endParaRPr lang="en-US"/>
           </a:p>
@@ -9532,7 +10144,7 @@
 </p:sld>
 </file>
 
-<file path=ppt/slides/slide5.xml><?xml version="1.0" encoding="utf-8"?>
+<file path=ppt/slides/slide6.xml><?xml version="1.0" encoding="utf-8"?>
 <p:sld xmlns:a="http://schemas.openxmlformats.org/drawingml/2006/main" xmlns:r="http://schemas.openxmlformats.org/officeDocument/2006/relationships" xmlns:p="http://schemas.openxmlformats.org/presentationml/2006/main">
   <p:cSld>
     <p:spTree>
@@ -9633,7 +10245,7 @@
           <a:p>
             <a:fld id="{CC057153-B650-4DEB-B370-79DDCFDCE934}" type="slidenum">
               <a:rPr lang="en-US" smtClean="0"/>
-              <a:t>5</a:t>
+              <a:t>6</a:t>
             </a:fld>
             <a:endParaRPr lang="en-US"/>
           </a:p>
@@ -9727,7 +10339,7 @@
 </p:sld>
 </file>
 
-<file path=ppt/slides/slide6.xml><?xml version="1.0" encoding="utf-8"?>
+<file path=ppt/slides/slide7.xml><?xml version="1.0" encoding="utf-8"?>
 <p:sld xmlns:a="http://schemas.openxmlformats.org/drawingml/2006/main" xmlns:r="http://schemas.openxmlformats.org/officeDocument/2006/relationships" xmlns:p="http://schemas.openxmlformats.org/presentationml/2006/main">
   <p:cSld>
     <p:spTree>
@@ -9767,7 +10379,7 @@
           <a:p>
             <a:fld id="{CC057153-B650-4DEB-B370-79DDCFDCE934}" type="slidenum">
               <a:rPr lang="en-US" smtClean="0"/>
-              <a:t>6</a:t>
+              <a:t>7</a:t>
             </a:fld>
             <a:endParaRPr lang="en-US"/>
           </a:p>
@@ -10273,7 +10885,7 @@
 </p:sld>
 </file>
 
-<file path=ppt/slides/slide7.xml><?xml version="1.0" encoding="utf-8"?>
+<file path=ppt/slides/slide8.xml><?xml version="1.0" encoding="utf-8"?>
 <p:sld xmlns:a="http://schemas.openxmlformats.org/drawingml/2006/main" xmlns:r="http://schemas.openxmlformats.org/officeDocument/2006/relationships" xmlns:p="http://schemas.openxmlformats.org/presentationml/2006/main">
   <p:cSld>
     <p:spTree>
@@ -10351,7 +10963,7 @@
           <a:p>
             <a:fld id="{CC057153-B650-4DEB-B370-79DDCFDCE934}" type="slidenum">
               <a:rPr lang="en-US" smtClean="0"/>
-              <a:t>7</a:t>
+              <a:t>8</a:t>
             </a:fld>
             <a:endParaRPr lang="en-US"/>
           </a:p>
@@ -10441,388 +11053,6 @@
     <p:extLst>
       <p:ext uri="{BB962C8B-B14F-4D97-AF65-F5344CB8AC3E}">
         <p14:creationId xmlns:p14="http://schemas.microsoft.com/office/powerpoint/2010/main" val="1079613130"/>
-      </p:ext>
-    </p:extLst>
-  </p:cSld>
-  <p:clrMapOvr>
-    <a:masterClrMapping/>
-  </p:clrMapOvr>
-</p:sld>
-</file>
-
-<file path=ppt/slides/slide8.xml><?xml version="1.0" encoding="utf-8"?>
-<p:sld xmlns:a="http://schemas.openxmlformats.org/drawingml/2006/main" xmlns:r="http://schemas.openxmlformats.org/officeDocument/2006/relationships" xmlns:p="http://schemas.openxmlformats.org/presentationml/2006/main">
-  <p:cSld>
-    <p:spTree>
-      <p:nvGrpSpPr>
-        <p:cNvPr id="1" name=""/>
-        <p:cNvGrpSpPr/>
-        <p:nvPr/>
-      </p:nvGrpSpPr>
-      <p:grpSpPr>
-        <a:xfrm>
-          <a:off x="0" y="0"/>
-          <a:ext cx="0" cy="0"/>
-          <a:chOff x="0" y="0"/>
-          <a:chExt cx="0" cy="0"/>
-        </a:xfrm>
-      </p:grpSpPr>
-      <p:sp>
-        <p:nvSpPr>
-          <p:cNvPr id="2" name="Title 1">
-            <a:extLst>
-              <a:ext uri="{FF2B5EF4-FFF2-40B4-BE49-F238E27FC236}">
-                <a16:creationId xmlns:a16="http://schemas.microsoft.com/office/drawing/2014/main" id="{501E8CF0-516E-97A2-51F1-74C310946EF6}"/>
-              </a:ext>
-            </a:extLst>
-          </p:cNvPr>
-          <p:cNvSpPr>
-            <a:spLocks noGrp="1"/>
-          </p:cNvSpPr>
-          <p:nvPr>
-            <p:ph type="title"/>
-          </p:nvPr>
-        </p:nvSpPr>
-        <p:spPr/>
-        <p:txBody>
-          <a:bodyPr/>
-          <a:lstStyle/>
-          <a:p>
-            <a:r>
-              <a:rPr lang="fi-FI" dirty="0" err="1"/>
-              <a:t>Further</a:t>
-            </a:r>
-            <a:r>
-              <a:rPr lang="fi-FI" dirty="0"/>
-              <a:t> </a:t>
-            </a:r>
-            <a:r>
-              <a:rPr lang="fi-FI" dirty="0" err="1"/>
-              <a:t>queries</a:t>
-            </a:r>
-            <a:r>
-              <a:rPr lang="fi-FI" dirty="0"/>
-              <a:t> </a:t>
-            </a:r>
-            <a:r>
-              <a:rPr lang="fi-FI" dirty="0" err="1"/>
-              <a:t>using</a:t>
-            </a:r>
-            <a:r>
-              <a:rPr lang="fi-FI" dirty="0"/>
-              <a:t> SQL</a:t>
-            </a:r>
-          </a:p>
-        </p:txBody>
-      </p:sp>
-      <p:sp>
-        <p:nvSpPr>
-          <p:cNvPr id="3" name="Content Placeholder 2">
-            <a:extLst>
-              <a:ext uri="{FF2B5EF4-FFF2-40B4-BE49-F238E27FC236}">
-                <a16:creationId xmlns:a16="http://schemas.microsoft.com/office/drawing/2014/main" id="{48D54960-1625-037D-879A-34F5E0AA3C7E}"/>
-              </a:ext>
-            </a:extLst>
-          </p:cNvPr>
-          <p:cNvSpPr>
-            <a:spLocks noGrp="1"/>
-          </p:cNvSpPr>
-          <p:nvPr>
-            <p:ph idx="1"/>
-          </p:nvPr>
-        </p:nvSpPr>
-        <p:spPr/>
-        <p:txBody>
-          <a:bodyPr/>
-          <a:lstStyle/>
-          <a:p>
-            <a:r>
-              <a:rPr lang="fi-FI" dirty="0"/>
-              <a:t>Top 10 </a:t>
-            </a:r>
-            <a:r>
-              <a:rPr lang="fi-FI" dirty="0" err="1"/>
-              <a:t>performing</a:t>
-            </a:r>
-            <a:r>
-              <a:rPr lang="fi-FI" dirty="0"/>
-              <a:t> </a:t>
-            </a:r>
-            <a:r>
-              <a:rPr lang="fi-FI" dirty="0" err="1"/>
-              <a:t>customers</a:t>
-            </a:r>
-            <a:endParaRPr lang="fi-FI" dirty="0"/>
-          </a:p>
-          <a:p>
-            <a:r>
-              <a:rPr lang="fi-FI" dirty="0"/>
-              <a:t>Top 10 </a:t>
-            </a:r>
-            <a:r>
-              <a:rPr lang="fi-FI" dirty="0" err="1"/>
-              <a:t>countries</a:t>
-            </a:r>
-            <a:r>
-              <a:rPr lang="fi-FI" dirty="0"/>
-              <a:t> </a:t>
-            </a:r>
-            <a:r>
-              <a:rPr lang="fi-FI" dirty="0" err="1"/>
-              <a:t>by</a:t>
-            </a:r>
-            <a:r>
-              <a:rPr lang="fi-FI" dirty="0"/>
-              <a:t> </a:t>
-            </a:r>
-            <a:r>
-              <a:rPr lang="fi-FI" dirty="0" err="1"/>
-              <a:t>revenue</a:t>
-            </a:r>
-            <a:endParaRPr lang="fi-FI" dirty="0"/>
-          </a:p>
-          <a:p>
-            <a:r>
-              <a:rPr lang="fi-FI" dirty="0"/>
-              <a:t>Top  10 </a:t>
-            </a:r>
-            <a:r>
-              <a:rPr lang="fi-FI" dirty="0" err="1"/>
-              <a:t>best</a:t>
-            </a:r>
-            <a:r>
-              <a:rPr lang="fi-FI" dirty="0"/>
-              <a:t> </a:t>
-            </a:r>
-            <a:r>
-              <a:rPr lang="fi-FI" dirty="0" err="1"/>
-              <a:t>selling</a:t>
-            </a:r>
-            <a:r>
-              <a:rPr lang="fi-FI" dirty="0"/>
-              <a:t> products</a:t>
-            </a:r>
-          </a:p>
-          <a:p>
-            <a:r>
-              <a:rPr lang="fi-FI" dirty="0"/>
-              <a:t>Top 10 products </a:t>
-            </a:r>
-            <a:r>
-              <a:rPr lang="fi-FI" dirty="0" err="1"/>
-              <a:t>by</a:t>
-            </a:r>
-            <a:r>
-              <a:rPr lang="fi-FI" dirty="0"/>
-              <a:t> </a:t>
-            </a:r>
-            <a:r>
-              <a:rPr lang="fi-FI" dirty="0" err="1"/>
-              <a:t>revenue</a:t>
-            </a:r>
-            <a:r>
-              <a:rPr lang="fi-FI" dirty="0"/>
-              <a:t> </a:t>
-            </a:r>
-            <a:r>
-              <a:rPr lang="fi-FI" dirty="0" err="1"/>
-              <a:t>generated</a:t>
-            </a:r>
-            <a:endParaRPr lang="fi-FI" dirty="0"/>
-          </a:p>
-          <a:p>
-            <a:r>
-              <a:rPr lang="fi-FI" dirty="0" err="1"/>
-              <a:t>Monthly</a:t>
-            </a:r>
-            <a:r>
-              <a:rPr lang="fi-FI" dirty="0"/>
-              <a:t> </a:t>
-            </a:r>
-            <a:r>
-              <a:rPr lang="fi-FI" dirty="0" err="1"/>
-              <a:t>revenue</a:t>
-            </a:r>
-            <a:r>
-              <a:rPr lang="fi-FI" dirty="0"/>
-              <a:t> </a:t>
-            </a:r>
-            <a:r>
-              <a:rPr lang="fi-FI" dirty="0" err="1"/>
-              <a:t>trend</a:t>
-            </a:r>
-            <a:r>
-              <a:rPr lang="fi-FI" dirty="0"/>
-              <a:t> and </a:t>
-            </a:r>
-            <a:r>
-              <a:rPr lang="fi-FI" dirty="0" err="1"/>
-              <a:t>monthly</a:t>
-            </a:r>
-            <a:r>
-              <a:rPr lang="fi-FI" dirty="0"/>
-              <a:t> </a:t>
-            </a:r>
-            <a:r>
-              <a:rPr lang="fi-FI" dirty="0" err="1"/>
-              <a:t>order</a:t>
-            </a:r>
-            <a:r>
-              <a:rPr lang="fi-FI" dirty="0"/>
-              <a:t> </a:t>
-            </a:r>
-            <a:r>
-              <a:rPr lang="fi-FI" dirty="0" err="1"/>
-              <a:t>volume</a:t>
-            </a:r>
-            <a:endParaRPr lang="fi-FI" dirty="0"/>
-          </a:p>
-          <a:p>
-            <a:r>
-              <a:rPr lang="fi-FI" dirty="0" err="1"/>
-              <a:t>Busiest</a:t>
-            </a:r>
-            <a:r>
-              <a:rPr lang="fi-FI" dirty="0"/>
-              <a:t> </a:t>
-            </a:r>
-            <a:r>
-              <a:rPr lang="fi-FI" dirty="0" err="1"/>
-              <a:t>days</a:t>
-            </a:r>
-            <a:r>
-              <a:rPr lang="fi-FI" dirty="0"/>
-              <a:t> of </a:t>
-            </a:r>
-            <a:r>
-              <a:rPr lang="fi-FI" dirty="0" err="1"/>
-              <a:t>the</a:t>
-            </a:r>
-            <a:r>
-              <a:rPr lang="fi-FI" dirty="0"/>
-              <a:t> </a:t>
-            </a:r>
-            <a:r>
-              <a:rPr lang="fi-FI" dirty="0" err="1"/>
-              <a:t>week</a:t>
-            </a:r>
-            <a:endParaRPr lang="fi-FI" dirty="0"/>
-          </a:p>
-          <a:p>
-            <a:r>
-              <a:rPr lang="fi-FI" dirty="0" err="1"/>
-              <a:t>Customer</a:t>
-            </a:r>
-            <a:r>
-              <a:rPr lang="fi-FI" dirty="0"/>
-              <a:t> </a:t>
-            </a:r>
-            <a:r>
-              <a:rPr lang="fi-FI" dirty="0" err="1"/>
-              <a:t>value</a:t>
-            </a:r>
-            <a:r>
-              <a:rPr lang="fi-FI" dirty="0"/>
-              <a:t> </a:t>
-            </a:r>
-            <a:r>
-              <a:rPr lang="fi-FI" dirty="0" err="1"/>
-              <a:t>by</a:t>
-            </a:r>
-            <a:r>
-              <a:rPr lang="fi-FI" dirty="0"/>
-              <a:t> </a:t>
-            </a:r>
-            <a:r>
-              <a:rPr lang="fi-FI" dirty="0" err="1"/>
-              <a:t>revenue</a:t>
-            </a:r>
-            <a:r>
-              <a:rPr lang="fi-FI" dirty="0"/>
-              <a:t> (VIP, Medium, </a:t>
-            </a:r>
-            <a:r>
-              <a:rPr lang="fi-FI" dirty="0" err="1"/>
-              <a:t>Low</a:t>
-            </a:r>
-            <a:r>
-              <a:rPr lang="fi-FI" dirty="0"/>
-              <a:t>)</a:t>
-            </a:r>
-          </a:p>
-          <a:p>
-            <a:r>
-              <a:rPr lang="fi-FI" dirty="0"/>
-              <a:t>Top 10 </a:t>
-            </a:r>
-            <a:r>
-              <a:rPr lang="fi-FI" dirty="0" err="1"/>
-              <a:t>product</a:t>
-            </a:r>
-            <a:r>
-              <a:rPr lang="fi-FI" dirty="0"/>
-              <a:t> </a:t>
-            </a:r>
-            <a:r>
-              <a:rPr lang="fi-FI" dirty="0" err="1"/>
-              <a:t>combinations</a:t>
-            </a:r>
-            <a:r>
-              <a:rPr lang="fi-FI" dirty="0"/>
-              <a:t> </a:t>
-            </a:r>
-            <a:r>
-              <a:rPr lang="fi-FI" dirty="0" err="1"/>
-              <a:t>by</a:t>
-            </a:r>
-            <a:r>
-              <a:rPr lang="fi-FI" dirty="0"/>
-              <a:t> </a:t>
-            </a:r>
-            <a:r>
-              <a:rPr lang="fi-FI" dirty="0" err="1"/>
-              <a:t>revenue</a:t>
-            </a:r>
-            <a:endParaRPr lang="fi-FI" dirty="0"/>
-          </a:p>
-          <a:p>
-            <a:endParaRPr lang="fi-FI" dirty="0"/>
-          </a:p>
-        </p:txBody>
-      </p:sp>
-      <p:sp>
-        <p:nvSpPr>
-          <p:cNvPr id="4" name="Slide Number Placeholder 3">
-            <a:extLst>
-              <a:ext uri="{FF2B5EF4-FFF2-40B4-BE49-F238E27FC236}">
-                <a16:creationId xmlns:a16="http://schemas.microsoft.com/office/drawing/2014/main" id="{20290E59-5EB8-2BA3-0019-1F40D909911F}"/>
-              </a:ext>
-            </a:extLst>
-          </p:cNvPr>
-          <p:cNvSpPr>
-            <a:spLocks noGrp="1"/>
-          </p:cNvSpPr>
-          <p:nvPr>
-            <p:ph type="sldNum" sz="quarter" idx="12"/>
-          </p:nvPr>
-        </p:nvSpPr>
-        <p:spPr/>
-        <p:txBody>
-          <a:bodyPr/>
-          <a:lstStyle/>
-          <a:p>
-            <a:fld id="{CC057153-B650-4DEB-B370-79DDCFDCE934}" type="slidenum">
-              <a:rPr lang="en-US" smtClean="0"/>
-              <a:t>8</a:t>
-            </a:fld>
-            <a:endParaRPr lang="en-US"/>
-          </a:p>
-        </p:txBody>
-      </p:sp>
-    </p:spTree>
-    <p:extLst>
-      <p:ext uri="{BB962C8B-B14F-4D97-AF65-F5344CB8AC3E}">
-        <p14:creationId xmlns:p14="http://schemas.microsoft.com/office/powerpoint/2010/main" val="1473184395"/>
       </p:ext>
     </p:extLst>
   </p:cSld>
@@ -10854,7 +11084,7 @@
           <p:cNvPr id="2" name="Title 1">
             <a:extLst>
               <a:ext uri="{FF2B5EF4-FFF2-40B4-BE49-F238E27FC236}">
-                <a16:creationId xmlns:a16="http://schemas.microsoft.com/office/drawing/2014/main" id="{F8F76E3C-D430-5B13-B197-74E630643F53}"/>
+                <a16:creationId xmlns:a16="http://schemas.microsoft.com/office/drawing/2014/main" id="{501E8CF0-516E-97A2-51F1-74C310946EF6}"/>
               </a:ext>
             </a:extLst>
           </p:cNvPr>
@@ -10865,28 +11095,35 @@
             <p:ph type="title"/>
           </p:nvPr>
         </p:nvSpPr>
-        <p:spPr>
-          <a:xfrm>
-            <a:off x="612648" y="548640"/>
-            <a:ext cx="2721102" cy="1132258"/>
-          </a:xfrm>
-        </p:spPr>
+        <p:spPr/>
         <p:txBody>
           <a:bodyPr/>
           <a:lstStyle/>
           <a:p>
             <a:r>
               <a:rPr lang="fi-FI" dirty="0" err="1"/>
-              <a:t>Extracted</a:t>
-            </a:r>
-            <a:br>
-              <a:rPr lang="fi-FI" dirty="0"/>
-            </a:br>
-            <a:r>
-              <a:rPr lang="fi-FI" dirty="0" err="1"/>
-              <a:t>Insights</a:t>
-            </a:r>
-            <a:endParaRPr lang="fi-FI" dirty="0"/>
+              <a:t>Further</a:t>
+            </a:r>
+            <a:r>
+              <a:rPr lang="fi-FI" dirty="0"/>
+              <a:t> </a:t>
+            </a:r>
+            <a:r>
+              <a:rPr lang="fi-FI" dirty="0" err="1"/>
+              <a:t>queries</a:t>
+            </a:r>
+            <a:r>
+              <a:rPr lang="fi-FI" dirty="0"/>
+              <a:t> </a:t>
+            </a:r>
+            <a:r>
+              <a:rPr lang="fi-FI" dirty="0" err="1"/>
+              <a:t>using</a:t>
+            </a:r>
+            <a:r>
+              <a:rPr lang="fi-FI" dirty="0"/>
+              <a:t> SQL</a:t>
+            </a:r>
           </a:p>
         </p:txBody>
       </p:sp>
@@ -10895,7 +11132,7 @@
           <p:cNvPr id="3" name="Content Placeholder 2">
             <a:extLst>
               <a:ext uri="{FF2B5EF4-FFF2-40B4-BE49-F238E27FC236}">
-                <a16:creationId xmlns:a16="http://schemas.microsoft.com/office/drawing/2014/main" id="{D610DF9F-B63C-69BE-C6AF-191A549C54CA}"/>
+                <a16:creationId xmlns:a16="http://schemas.microsoft.com/office/drawing/2014/main" id="{48D54960-1625-037D-879A-34F5E0AA3C7E}"/>
               </a:ext>
             </a:extLst>
           </p:cNvPr>
@@ -10913,35 +11150,256 @@
           <a:p>
             <a:r>
               <a:rPr lang="fi-FI" dirty="0"/>
-              <a:t>RFM Analysis</a:t>
-            </a:r>
-          </a:p>
-          <a:p>
-            <a:r>
-              <a:rPr lang="fi-FI" dirty="0" err="1"/>
-              <a:t>Recency</a:t>
-            </a:r>
-            <a:r>
-              <a:rPr lang="fi-FI" dirty="0"/>
-              <a:t>, </a:t>
-            </a:r>
-            <a:r>
-              <a:rPr lang="fi-FI" dirty="0" err="1"/>
-              <a:t>Frequency</a:t>
-            </a:r>
-            <a:r>
-              <a:rPr lang="fi-FI" dirty="0"/>
-              <a:t>,</a:t>
-            </a:r>
-            <a:br>
-              <a:rPr lang="fi-FI" dirty="0"/>
-            </a:br>
-            <a:r>
-              <a:rPr lang="fi-FI" dirty="0" err="1"/>
-              <a:t>Monetary</a:t>
+              <a:t>Top 10 </a:t>
+            </a:r>
+            <a:r>
+              <a:rPr lang="fi-FI" dirty="0" err="1"/>
+              <a:t>performing</a:t>
+            </a:r>
+            <a:r>
+              <a:rPr lang="fi-FI" dirty="0"/>
+              <a:t> </a:t>
+            </a:r>
+            <a:r>
+              <a:rPr lang="fi-FI" dirty="0" err="1"/>
+              <a:t>customers</a:t>
             </a:r>
             <a:endParaRPr lang="fi-FI" dirty="0"/>
           </a:p>
+          <a:p>
+            <a:r>
+              <a:rPr lang="fi-FI" dirty="0"/>
+              <a:t>Top 10 </a:t>
+            </a:r>
+            <a:r>
+              <a:rPr lang="fi-FI" dirty="0" err="1"/>
+              <a:t>countries</a:t>
+            </a:r>
+            <a:r>
+              <a:rPr lang="fi-FI" dirty="0"/>
+              <a:t> </a:t>
+            </a:r>
+            <a:r>
+              <a:rPr lang="fi-FI" dirty="0" err="1"/>
+              <a:t>by</a:t>
+            </a:r>
+            <a:r>
+              <a:rPr lang="fi-FI" dirty="0"/>
+              <a:t> </a:t>
+            </a:r>
+            <a:r>
+              <a:rPr lang="fi-FI" dirty="0" err="1"/>
+              <a:t>revenue</a:t>
+            </a:r>
+            <a:endParaRPr lang="fi-FI" dirty="0"/>
+          </a:p>
+          <a:p>
+            <a:r>
+              <a:rPr lang="fi-FI" dirty="0"/>
+              <a:t>Top  10 </a:t>
+            </a:r>
+            <a:r>
+              <a:rPr lang="fi-FI" dirty="0" err="1"/>
+              <a:t>best</a:t>
+            </a:r>
+            <a:r>
+              <a:rPr lang="fi-FI" dirty="0"/>
+              <a:t> </a:t>
+            </a:r>
+            <a:r>
+              <a:rPr lang="fi-FI" dirty="0" err="1"/>
+              <a:t>selling</a:t>
+            </a:r>
+            <a:r>
+              <a:rPr lang="fi-FI" dirty="0"/>
+              <a:t> products</a:t>
+            </a:r>
+          </a:p>
+          <a:p>
+            <a:r>
+              <a:rPr lang="fi-FI" dirty="0"/>
+              <a:t>Top 10 products </a:t>
+            </a:r>
+            <a:r>
+              <a:rPr lang="fi-FI" dirty="0" err="1"/>
+              <a:t>by</a:t>
+            </a:r>
+            <a:r>
+              <a:rPr lang="fi-FI" dirty="0"/>
+              <a:t> </a:t>
+            </a:r>
+            <a:r>
+              <a:rPr lang="fi-FI" dirty="0" err="1"/>
+              <a:t>revenue</a:t>
+            </a:r>
+            <a:r>
+              <a:rPr lang="fi-FI" dirty="0"/>
+              <a:t> </a:t>
+            </a:r>
+            <a:r>
+              <a:rPr lang="fi-FI" dirty="0" err="1"/>
+              <a:t>generated</a:t>
+            </a:r>
+            <a:endParaRPr lang="fi-FI" dirty="0"/>
+          </a:p>
+          <a:p>
+            <a:r>
+              <a:rPr lang="fi-FI" dirty="0" err="1"/>
+              <a:t>Monthly</a:t>
+            </a:r>
+            <a:r>
+              <a:rPr lang="fi-FI" dirty="0"/>
+              <a:t> </a:t>
+            </a:r>
+            <a:r>
+              <a:rPr lang="fi-FI" dirty="0" err="1"/>
+              <a:t>revenue</a:t>
+            </a:r>
+            <a:r>
+              <a:rPr lang="fi-FI" dirty="0"/>
+              <a:t> </a:t>
+            </a:r>
+            <a:r>
+              <a:rPr lang="fi-FI" dirty="0" err="1"/>
+              <a:t>trend</a:t>
+            </a:r>
+            <a:r>
+              <a:rPr lang="fi-FI" dirty="0"/>
+              <a:t> and </a:t>
+            </a:r>
+            <a:r>
+              <a:rPr lang="fi-FI" dirty="0" err="1"/>
+              <a:t>monthly</a:t>
+            </a:r>
+            <a:r>
+              <a:rPr lang="fi-FI" dirty="0"/>
+              <a:t> </a:t>
+            </a:r>
+            <a:r>
+              <a:rPr lang="fi-FI" dirty="0" err="1"/>
+              <a:t>order</a:t>
+            </a:r>
+            <a:r>
+              <a:rPr lang="fi-FI" dirty="0"/>
+              <a:t> </a:t>
+            </a:r>
+            <a:r>
+              <a:rPr lang="fi-FI" dirty="0" err="1"/>
+              <a:t>volume</a:t>
+            </a:r>
+            <a:endParaRPr lang="fi-FI" dirty="0"/>
+          </a:p>
+          <a:p>
+            <a:r>
+              <a:rPr lang="fi-FI" dirty="0" err="1"/>
+              <a:t>Busiest</a:t>
+            </a:r>
+            <a:r>
+              <a:rPr lang="fi-FI" dirty="0"/>
+              <a:t> </a:t>
+            </a:r>
+            <a:r>
+              <a:rPr lang="fi-FI" dirty="0" err="1"/>
+              <a:t>days</a:t>
+            </a:r>
+            <a:r>
+              <a:rPr lang="fi-FI" dirty="0"/>
+              <a:t> of </a:t>
+            </a:r>
+            <a:r>
+              <a:rPr lang="fi-FI" dirty="0" err="1"/>
+              <a:t>the</a:t>
+            </a:r>
+            <a:r>
+              <a:rPr lang="fi-FI" dirty="0"/>
+              <a:t> </a:t>
+            </a:r>
+            <a:r>
+              <a:rPr lang="fi-FI" dirty="0" err="1"/>
+              <a:t>week</a:t>
+            </a:r>
+            <a:endParaRPr lang="fi-FI" dirty="0"/>
+          </a:p>
+          <a:p>
+            <a:r>
+              <a:rPr lang="fi-FI" dirty="0" err="1"/>
+              <a:t>Customer</a:t>
+            </a:r>
+            <a:r>
+              <a:rPr lang="fi-FI" dirty="0"/>
+              <a:t> </a:t>
+            </a:r>
+            <a:r>
+              <a:rPr lang="fi-FI" dirty="0" err="1"/>
+              <a:t>value</a:t>
+            </a:r>
+            <a:r>
+              <a:rPr lang="fi-FI" dirty="0"/>
+              <a:t> </a:t>
+            </a:r>
+            <a:r>
+              <a:rPr lang="fi-FI" dirty="0" err="1"/>
+              <a:t>by</a:t>
+            </a:r>
+            <a:r>
+              <a:rPr lang="fi-FI" dirty="0"/>
+              <a:t> </a:t>
+            </a:r>
+            <a:r>
+              <a:rPr lang="fi-FI" dirty="0" err="1"/>
+              <a:t>revenue</a:t>
+            </a:r>
+            <a:r>
+              <a:rPr lang="fi-FI" dirty="0"/>
+              <a:t> (VIP, Medium, </a:t>
+            </a:r>
+            <a:r>
+              <a:rPr lang="fi-FI" dirty="0" err="1"/>
+              <a:t>Low</a:t>
+            </a:r>
+            <a:r>
+              <a:rPr lang="fi-FI" dirty="0"/>
+              <a:t>)</a:t>
+            </a:r>
+          </a:p>
+          <a:p>
+            <a:r>
+              <a:rPr lang="fi-FI" dirty="0"/>
+              <a:t>Top 10 </a:t>
+            </a:r>
+            <a:r>
+              <a:rPr lang="fi-FI" dirty="0" err="1"/>
+              <a:t>product</a:t>
+            </a:r>
+            <a:r>
+              <a:rPr lang="fi-FI" dirty="0"/>
+              <a:t> </a:t>
+            </a:r>
+            <a:r>
+              <a:rPr lang="fi-FI" dirty="0" err="1"/>
+              <a:t>combinations</a:t>
+            </a:r>
+            <a:r>
+              <a:rPr lang="fi-FI" dirty="0"/>
+              <a:t> </a:t>
+            </a:r>
+            <a:r>
+              <a:rPr lang="fi-FI" dirty="0" err="1"/>
+              <a:t>by</a:t>
+            </a:r>
+            <a:r>
+              <a:rPr lang="fi-FI" dirty="0"/>
+              <a:t> </a:t>
+            </a:r>
+            <a:r>
+              <a:rPr lang="fi-FI" dirty="0" err="1"/>
+              <a:t>revenue</a:t>
+            </a:r>
+            <a:endParaRPr lang="fi-FI" dirty="0"/>
+          </a:p>
+          <a:p>
+            <a:endParaRPr lang="fi-FI" dirty="0"/>
+          </a:p>
         </p:txBody>
       </p:sp>
       <p:sp>
@@ -10949,7 +11407,7 @@
           <p:cNvPr id="4" name="Slide Number Placeholder 3">
             <a:extLst>
               <a:ext uri="{FF2B5EF4-FFF2-40B4-BE49-F238E27FC236}">
-                <a16:creationId xmlns:a16="http://schemas.microsoft.com/office/drawing/2014/main" id="{F97DAC22-F83D-19F7-38F8-9243F04B5C8B}"/>
+                <a16:creationId xmlns:a16="http://schemas.microsoft.com/office/drawing/2014/main" id="{20290E59-5EB8-2BA3-0019-1F40D909911F}"/>
               </a:ext>
             </a:extLst>
           </p:cNvPr>
@@ -10973,47 +11431,10 @@
           </a:p>
         </p:txBody>
       </p:sp>
-      <p:pic>
-        <p:nvPicPr>
-          <p:cNvPr id="7" name="Picture 6">
-            <a:extLst>
-              <a:ext uri="{FF2B5EF4-FFF2-40B4-BE49-F238E27FC236}">
-                <a16:creationId xmlns:a16="http://schemas.microsoft.com/office/drawing/2014/main" id="{20F9C5CE-EB87-6F95-982C-7A45D9369BCF}"/>
-              </a:ext>
-            </a:extLst>
-          </p:cNvPr>
-          <p:cNvPicPr>
-            <a:picLocks noChangeAspect="1"/>
-          </p:cNvPicPr>
-          <p:nvPr/>
-        </p:nvPicPr>
-        <p:blipFill>
-          <a:blip r:embed="rId2">
-            <a:extLst>
-              <a:ext uri="{28A0092B-C50C-407E-A947-70E740481C1C}">
-                <a14:useLocalDpi xmlns:a14="http://schemas.microsoft.com/office/drawing/2010/main" val="0"/>
-              </a:ext>
-            </a:extLst>
-          </a:blip>
-          <a:srcRect l="587" t="947"/>
-          <a:stretch>
-            <a:fillRect/>
-          </a:stretch>
-        </p:blipFill>
-        <p:spPr>
-          <a:xfrm>
-            <a:off x="3548048" y="548640"/>
-            <a:ext cx="7718178" cy="5139197"/>
-          </a:xfrm>
-          <a:prstGeom prst="rect">
-            <a:avLst/>
-          </a:prstGeom>
-        </p:spPr>
-      </p:pic>
     </p:spTree>
     <p:extLst>
       <p:ext uri="{BB962C8B-B14F-4D97-AF65-F5344CB8AC3E}">
-        <p14:creationId xmlns:p14="http://schemas.microsoft.com/office/powerpoint/2010/main" val="3013404686"/>
+        <p14:creationId xmlns:p14="http://schemas.microsoft.com/office/powerpoint/2010/main" val="1473184395"/>
       </p:ext>
     </p:extLst>
   </p:cSld>

--- a/myyntidata_analyysi_07.04.pptx
+++ b/myyntidata_analyysi_07.04.pptx
@@ -6254,7 +6254,7 @@
         </p:nvSpPr>
         <p:spPr>
           <a:xfrm>
-            <a:off x="612648" y="38819"/>
+            <a:off x="256032" y="38819"/>
             <a:ext cx="4621553" cy="1034577"/>
           </a:xfrm>
         </p:spPr>
@@ -6373,90 +6373,146 @@
       </p:pic>
       <p:sp>
         <p:nvSpPr>
-          <p:cNvPr id="10" name="Content Placeholder 9">
-            <a:extLst>
-              <a:ext uri="{FF2B5EF4-FFF2-40B4-BE49-F238E27FC236}">
-                <a16:creationId xmlns:a16="http://schemas.microsoft.com/office/drawing/2014/main" id="{74886546-5632-4383-9F97-03F97246B578}"/>
-              </a:ext>
-            </a:extLst>
-          </p:cNvPr>
-          <p:cNvSpPr>
-            <a:spLocks noGrp="1"/>
-          </p:cNvSpPr>
-          <p:nvPr>
-            <p:ph idx="1"/>
-          </p:nvPr>
+          <p:cNvPr id="11" name="TextBox 10">
+            <a:extLst>
+              <a:ext uri="{FF2B5EF4-FFF2-40B4-BE49-F238E27FC236}">
+                <a16:creationId xmlns:a16="http://schemas.microsoft.com/office/drawing/2014/main" id="{32B78F2D-BFB8-93BF-5E1E-03F96606B429}"/>
+              </a:ext>
+            </a:extLst>
+          </p:cNvPr>
+          <p:cNvSpPr txBox="1"/>
+          <p:nvPr/>
         </p:nvSpPr>
         <p:spPr>
           <a:xfrm>
-            <a:off x="147426" y="1073396"/>
-            <a:ext cx="4621553" cy="3159018"/>
+            <a:off x="256032" y="1153443"/>
+            <a:ext cx="3419856" cy="2585323"/>
           </a:xfrm>
+          <a:prstGeom prst="rect">
+            <a:avLst/>
+          </a:prstGeom>
+          <a:noFill/>
         </p:spPr>
         <p:txBody>
-          <a:bodyPr>
-            <a:normAutofit/>
+          <a:bodyPr wrap="square" rtlCol="0">
+            <a:spAutoFit/>
           </a:bodyPr>
           <a:lstStyle/>
           <a:p>
-            <a:r>
-              <a:rPr lang="en-US" sz="1800" dirty="0"/>
-              <a:t>Correct and adjusted results</a:t>
-            </a:r>
-          </a:p>
-          <a:p>
-            <a:r>
-              <a:rPr lang="fi-FI" sz="1800" dirty="0" err="1"/>
+            <a:pPr marL="285750" indent="-285750">
+              <a:buFont typeface="Arial" panose="020B0604020202020204" pitchFamily="34" charset="0"/>
+              <a:buChar char="•"/>
+            </a:pPr>
+            <a:r>
+              <a:rPr lang="fi-FI" dirty="0" err="1"/>
+              <a:t>Number</a:t>
+            </a:r>
+            <a:r>
+              <a:rPr lang="fi-FI" dirty="0"/>
+              <a:t> of </a:t>
+            </a:r>
+            <a:r>
+              <a:rPr lang="fi-FI" dirty="0" err="1"/>
+              <a:t>leaves</a:t>
+            </a:r>
+            <a:r>
+              <a:rPr lang="fi-FI" dirty="0"/>
+              <a:t>: 29</a:t>
+            </a:r>
+          </a:p>
+          <a:p>
+            <a:pPr marL="285750" indent="-285750">
+              <a:buFont typeface="Arial" panose="020B0604020202020204" pitchFamily="34" charset="0"/>
+              <a:buChar char="•"/>
+            </a:pPr>
+            <a:r>
+              <a:rPr lang="fi-FI" dirty="0"/>
+              <a:t>Max </a:t>
+            </a:r>
+            <a:r>
+              <a:rPr lang="fi-FI" dirty="0" err="1"/>
+              <a:t>depth</a:t>
+            </a:r>
+            <a:r>
+              <a:rPr lang="fi-FI" dirty="0"/>
+              <a:t>: 5</a:t>
+            </a:r>
+          </a:p>
+          <a:p>
+            <a:pPr marL="285750" indent="-285750">
+              <a:buFont typeface="Arial" panose="020B0604020202020204" pitchFamily="34" charset="0"/>
+              <a:buChar char="•"/>
+            </a:pPr>
+            <a:r>
+              <a:rPr lang="fi-FI" dirty="0" err="1"/>
               <a:t>Model</a:t>
             </a:r>
             <a:r>
-              <a:rPr lang="fi-FI" sz="1800" dirty="0"/>
+              <a:rPr lang="fi-FI" dirty="0"/>
               <a:t> Performance:</a:t>
             </a:r>
           </a:p>
           <a:p>
-            <a:pPr lvl="1"/>
+            <a:pPr marL="742950" lvl="1" indent="-285750">
+              <a:buFont typeface="Arial" panose="020B0604020202020204" pitchFamily="34" charset="0"/>
+              <a:buChar char="•"/>
+            </a:pPr>
             <a:r>
               <a:rPr lang="fi-FI" dirty="0" err="1"/>
               <a:t>Accuracy</a:t>
             </a:r>
             <a:r>
               <a:rPr lang="fi-FI" dirty="0"/>
-              <a:t>: 0.6837 </a:t>
-            </a:r>
-          </a:p>
-          <a:p>
-            <a:pPr lvl="1"/>
-            <a:r>
-              <a:rPr lang="fi-FI" dirty="0"/>
-              <a:t>Precision: 0.5992</a:t>
-            </a:r>
-          </a:p>
-          <a:p>
-            <a:pPr lvl="1"/>
+              <a:t>: 0.6663</a:t>
+            </a:r>
+          </a:p>
+          <a:p>
+            <a:pPr marL="742950" lvl="1" indent="-285750">
+              <a:buFont typeface="Arial" panose="020B0604020202020204" pitchFamily="34" charset="0"/>
+              <a:buChar char="•"/>
+            </a:pPr>
+            <a:r>
+              <a:rPr lang="fi-FI" dirty="0"/>
+              <a:t>Precision: 0.6320</a:t>
+            </a:r>
+          </a:p>
+          <a:p>
+            <a:pPr marL="742950" lvl="1" indent="-285750">
+              <a:buFont typeface="Arial" panose="020B0604020202020204" pitchFamily="34" charset="0"/>
+              <a:buChar char="•"/>
+            </a:pPr>
             <a:r>
               <a:rPr lang="fi-FI" dirty="0" err="1"/>
               <a:t>Recall</a:t>
             </a:r>
             <a:r>
               <a:rPr lang="fi-FI" dirty="0"/>
-              <a:t>: 0.8329 </a:t>
-            </a:r>
-          </a:p>
-          <a:p>
-            <a:pPr lvl="1"/>
-            <a:r>
-              <a:rPr lang="fi-FI" dirty="0"/>
-              <a:t>F1-Score: 0.6970</a:t>
-            </a:r>
-          </a:p>
-          <a:p>
-            <a:pPr lvl="1"/>
-            <a:r>
-              <a:rPr lang="fi-FI" dirty="0"/>
-              <a:t>ROC-AUC: 0.7598</a:t>
+              <a:t>: 0.5650</a:t>
+            </a:r>
+          </a:p>
+          <a:p>
+            <a:pPr marL="742950" lvl="1" indent="-285750">
+              <a:buFont typeface="Arial" panose="020B0604020202020204" pitchFamily="34" charset="0"/>
+              <a:buChar char="•"/>
+            </a:pPr>
+            <a:r>
+              <a:rPr lang="fi-FI" dirty="0"/>
+              <a:t>F1-Score: 0.5966</a:t>
+            </a:r>
+          </a:p>
+          <a:p>
+            <a:pPr marL="742950" lvl="1" indent="-285750">
+              <a:buFont typeface="Arial" panose="020B0604020202020204" pitchFamily="34" charset="0"/>
+              <a:buChar char="•"/>
+            </a:pPr>
+            <a:r>
+              <a:rPr lang="fi-FI" dirty="0"/>
+              <a:t>ROC-AUC: 0.7435</a:t>
             </a:r>
             <a:endParaRPr lang="en-US" dirty="0"/>
+          </a:p>
+          <a:p>
+            <a:endParaRPr lang="fi-FI" dirty="0"/>
           </a:p>
         </p:txBody>
       </p:sp>
@@ -8391,8 +8447,12 @@
           </a:p>
           <a:p>
             <a:r>
-              <a:rPr lang="fi-FI" dirty="0"/>
-              <a:t>Works is </a:t>
+              <a:rPr lang="fi-FI" dirty="0" err="1"/>
+              <a:t>Work</a:t>
+            </a:r>
+            <a:r>
+              <a:rPr lang="fi-FI" dirty="0"/>
+              <a:t> is </a:t>
             </a:r>
             <a:r>
               <a:rPr lang="fi-FI" dirty="0" err="1"/>
@@ -8421,6 +8481,14 @@
             <a:r>
               <a:rPr lang="fi-FI" dirty="0" err="1"/>
               <a:t>tools</a:t>
+            </a:r>
+            <a:r>
+              <a:rPr lang="fi-FI" dirty="0"/>
+              <a:t> (SQL, Python, ML</a:t>
+            </a:r>
+            <a:r>
+              <a:rPr lang="fi-FI"/>
+              <a:t>, Power BI)</a:t>
             </a:r>
             <a:endParaRPr lang="fi-FI" dirty="0"/>
           </a:p>
@@ -8646,12 +8714,8 @@
               <a:t>visualisation</a:t>
             </a:r>
             <a:r>
-              <a:rPr lang="fi-FI"/>
-              <a:t> data </a:t>
-            </a:r>
-            <a:r>
-              <a:rPr lang="fi-FI" dirty="0"/>
-              <a:t>to </a:t>
+              <a:rPr lang="fi-FI" dirty="0"/>
+              <a:t> data to </a:t>
             </a:r>
             <a:r>
               <a:rPr lang="fi-FI" dirty="0" err="1"/>
